--- a/images/Num_Ouvrages.pptx
+++ b/images/Num_Ouvrages.pptx
@@ -5,7 +5,7 @@
     <p:sldMasterId id="2147483648" r:id="rId1"/>
   </p:sldMasterIdLst>
   <p:sldIdLst>
-    <p:sldId id="256" r:id="rId2"/>
+    <p:sldId id="257" r:id="rId2"/>
   </p:sldIdLst>
   <p:sldSz cx="12192000" cy="6858000"/>
   <p:notesSz cx="6858000" cy="9144000"/>
@@ -104,6 +104,11 @@
       </a:defRPr>
     </a:lvl9pPr>
   </p:defaultTextStyle>
+  <p:extLst>
+    <p:ext uri="{EFAFB233-063F-42B5-8137-9DF3F51BA10A}">
+      <p15:sldGuideLst xmlns:p15="http://schemas.microsoft.com/office/powerpoint/2012/main"/>
+    </p:ext>
+  </p:extLst>
 </p:presentation>
 </file>
 
@@ -2966,13 +2971,13 @@
       </p:grpSpPr>
       <p:pic>
         <p:nvPicPr>
-          <p:cNvPr id="4" name="Picture 3"/>
+          <p:cNvPr id="3" name="Picture 2"/>
           <p:cNvPicPr>
             <a:picLocks noChangeAspect="1"/>
           </p:cNvPicPr>
           <p:nvPr/>
         </p:nvPicPr>
-        <p:blipFill>
+        <p:blipFill rotWithShape="1">
           <a:blip r:embed="rId2">
             <a:extLst>
               <a:ext uri="{28A0092B-C50C-407E-A947-70E740481C1C}">
@@ -2980,14 +2985,13 @@
               </a:ext>
             </a:extLst>
           </a:blip>
-          <a:stretch>
-            <a:fillRect/>
-          </a:stretch>
+          <a:srcRect b="31648"/>
+          <a:stretch/>
         </p:blipFill>
         <p:spPr>
           <a:xfrm>
-            <a:off x="0" y="472440"/>
-            <a:ext cx="12192000" cy="5913120"/>
+            <a:off x="0" y="3514"/>
+            <a:ext cx="12192000" cy="4682786"/>
           </a:xfrm>
           <a:prstGeom prst="rect">
             <a:avLst/>
@@ -3002,7 +3006,7 @@
         </p:nvGrpSpPr>
         <p:grpSpPr>
           <a:xfrm>
-            <a:off x="6525789" y="2144564"/>
+            <a:off x="6210025" y="1401203"/>
             <a:ext cx="434176" cy="414440"/>
             <a:chOff x="1302526" y="4999597"/>
             <a:chExt cx="434176" cy="414440"/>
@@ -3105,7 +3109,7 @@
         </p:nvGrpSpPr>
         <p:grpSpPr>
           <a:xfrm>
-            <a:off x="2875864" y="2215282"/>
+            <a:off x="2948227" y="1290937"/>
             <a:ext cx="434176" cy="414440"/>
             <a:chOff x="1302526" y="4999597"/>
             <a:chExt cx="434176" cy="414440"/>
@@ -3208,7 +3212,7 @@
         </p:nvGrpSpPr>
         <p:grpSpPr>
           <a:xfrm>
-            <a:off x="10677867" y="1500976"/>
+            <a:off x="9645056" y="757614"/>
             <a:ext cx="434176" cy="414440"/>
             <a:chOff x="1302526" y="4999597"/>
             <a:chExt cx="434176" cy="414440"/>
@@ -3311,7 +3315,7 @@
         </p:nvGrpSpPr>
         <p:grpSpPr>
           <a:xfrm>
-            <a:off x="7901775" y="3014560"/>
+            <a:off x="7355767" y="2126474"/>
             <a:ext cx="434176" cy="414440"/>
             <a:chOff x="1302526" y="4999597"/>
             <a:chExt cx="434176" cy="414440"/>
@@ -3414,7 +3418,7 @@
         </p:nvGrpSpPr>
         <p:grpSpPr>
           <a:xfrm>
-            <a:off x="10664710" y="4158656"/>
+            <a:off x="9645056" y="2941649"/>
             <a:ext cx="434176" cy="414440"/>
             <a:chOff x="1302526" y="4999597"/>
             <a:chExt cx="434176" cy="414440"/>
@@ -3517,7 +3521,7 @@
         </p:nvGrpSpPr>
         <p:grpSpPr>
           <a:xfrm>
-            <a:off x="1179729" y="4936554"/>
+            <a:off x="1491107" y="3627449"/>
             <a:ext cx="434176" cy="414440"/>
             <a:chOff x="1302526" y="4999597"/>
             <a:chExt cx="434176" cy="414440"/>
@@ -3620,7 +3624,7 @@
         </p:nvGrpSpPr>
         <p:grpSpPr>
           <a:xfrm>
-            <a:off x="1271827" y="4181210"/>
+            <a:off x="1679689" y="3037114"/>
             <a:ext cx="434176" cy="414440"/>
             <a:chOff x="1302526" y="4999597"/>
             <a:chExt cx="434176" cy="414440"/>
@@ -3718,13 +3722,20 @@
     </p:spTree>
     <p:extLst>
       <p:ext uri="{BB962C8B-B14F-4D97-AF65-F5344CB8AC3E}">
-        <p14:creationId xmlns:p14="http://schemas.microsoft.com/office/powerpoint/2010/main" val="3980067379"/>
+        <p14:creationId xmlns:p14="http://schemas.microsoft.com/office/powerpoint/2010/main" val="4012979273"/>
       </p:ext>
     </p:extLst>
   </p:cSld>
   <p:clrMapOvr>
     <a:masterClrMapping/>
   </p:clrMapOvr>
+  <p:timing>
+    <p:tnLst>
+      <p:par>
+        <p:cTn id="1" dur="indefinite" restart="never" nodeType="tmRoot"/>
+      </p:par>
+    </p:tnLst>
+  </p:timing>
 </p:sld>
 </file>
 

--- a/images/Num_Ouvrages.pptx
+++ b/images/Num_Ouvrages.pptx
@@ -6,6 +6,7 @@
   </p:sldMasterIdLst>
   <p:sldIdLst>
     <p:sldId id="257" r:id="rId2"/>
+    <p:sldId id="258" r:id="rId3"/>
   </p:sldIdLst>
   <p:sldSz cx="12192000" cy="6858000"/>
   <p:notesSz cx="6858000" cy="9144000"/>
@@ -3739,6 +3740,793 @@
 </p:sld>
 </file>
 
+<file path=ppt/slides/slide2.xml><?xml version="1.0" encoding="utf-8"?>
+<p:sld xmlns:a="http://schemas.openxmlformats.org/drawingml/2006/main" xmlns:r="http://schemas.openxmlformats.org/officeDocument/2006/relationships" xmlns:p="http://schemas.openxmlformats.org/presentationml/2006/main">
+  <p:cSld>
+    <p:spTree>
+      <p:nvGrpSpPr>
+        <p:cNvPr id="1" name=""/>
+        <p:cNvGrpSpPr/>
+        <p:nvPr/>
+      </p:nvGrpSpPr>
+      <p:grpSpPr>
+        <a:xfrm>
+          <a:off x="0" y="0"/>
+          <a:ext cx="0" cy="0"/>
+          <a:chOff x="0" y="0"/>
+          <a:chExt cx="0" cy="0"/>
+        </a:xfrm>
+      </p:grpSpPr>
+      <p:pic>
+        <p:nvPicPr>
+          <p:cNvPr id="2" name="Picture 1"/>
+          <p:cNvPicPr>
+            <a:picLocks noChangeAspect="1"/>
+          </p:cNvPicPr>
+          <p:nvPr/>
+        </p:nvPicPr>
+        <p:blipFill rotWithShape="1">
+          <a:blip r:embed="rId2" cstate="print">
+            <a:extLst>
+              <a:ext uri="{28A0092B-C50C-407E-A947-70E740481C1C}">
+                <a14:useLocalDpi xmlns:a14="http://schemas.microsoft.com/office/drawing/2010/main" val="0"/>
+              </a:ext>
+            </a:extLst>
+          </a:blip>
+          <a:srcRect l="3849" t="22991" r="6669" b="36611"/>
+          <a:stretch/>
+        </p:blipFill>
+        <p:spPr>
+          <a:xfrm>
+            <a:off x="0" y="342078"/>
+            <a:ext cx="12168542" cy="3880298"/>
+          </a:xfrm>
+          <a:prstGeom prst="rect">
+            <a:avLst/>
+          </a:prstGeom>
+        </p:spPr>
+      </p:pic>
+      <p:grpSp>
+        <p:nvGrpSpPr>
+          <p:cNvPr id="7" name="Group 6"/>
+          <p:cNvGrpSpPr/>
+          <p:nvPr/>
+        </p:nvGrpSpPr>
+        <p:grpSpPr>
+          <a:xfrm>
+            <a:off x="5919147" y="1653531"/>
+            <a:ext cx="434176" cy="414440"/>
+            <a:chOff x="1302526" y="4999597"/>
+            <a:chExt cx="434176" cy="414440"/>
+          </a:xfrm>
+        </p:grpSpPr>
+        <p:sp>
+          <p:nvSpPr>
+            <p:cNvPr id="5" name="Oval 4"/>
+            <p:cNvSpPr/>
+            <p:nvPr/>
+          </p:nvSpPr>
+          <p:spPr>
+            <a:xfrm>
+              <a:off x="1315683" y="4999597"/>
+              <a:ext cx="407862" cy="414440"/>
+            </a:xfrm>
+            <a:prstGeom prst="ellipse">
+              <a:avLst/>
+            </a:prstGeom>
+            <a:solidFill>
+              <a:schemeClr val="dk1">
+                <a:alpha val="50000"/>
+              </a:schemeClr>
+            </a:solidFill>
+            <a:ln>
+              <a:noFill/>
+            </a:ln>
+          </p:spPr>
+          <p:style>
+            <a:lnRef idx="0">
+              <a:scrgbClr r="0" g="0" b="0"/>
+            </a:lnRef>
+            <a:fillRef idx="0">
+              <a:scrgbClr r="0" g="0" b="0"/>
+            </a:fillRef>
+            <a:effectRef idx="0">
+              <a:scrgbClr r="0" g="0" b="0"/>
+            </a:effectRef>
+            <a:fontRef idx="minor">
+              <a:schemeClr val="lt1"/>
+            </a:fontRef>
+          </p:style>
+          <p:txBody>
+            <a:bodyPr rtlCol="0" anchor="ctr"/>
+            <a:lstStyle/>
+            <a:p>
+              <a:pPr algn="ctr"/>
+              <a:endParaRPr lang="fr-FR" sz="700" dirty="0"/>
+            </a:p>
+          </p:txBody>
+        </p:sp>
+        <p:sp>
+          <p:nvSpPr>
+            <p:cNvPr id="6" name="TextBox 5"/>
+            <p:cNvSpPr txBox="1"/>
+            <p:nvPr/>
+          </p:nvSpPr>
+          <p:spPr>
+            <a:xfrm>
+              <a:off x="1302526" y="5022151"/>
+              <a:ext cx="434176" cy="369332"/>
+            </a:xfrm>
+            <a:prstGeom prst="rect">
+              <a:avLst/>
+            </a:prstGeom>
+            <a:noFill/>
+          </p:spPr>
+          <p:txBody>
+            <a:bodyPr wrap="square" rtlCol="0">
+              <a:spAutoFit/>
+            </a:bodyPr>
+            <a:lstStyle/>
+            <a:p>
+              <a:r>
+                <a:rPr lang="fr-FR" dirty="0" smtClean="0">
+                  <a:solidFill>
+                    <a:schemeClr val="bg1"/>
+                  </a:solidFill>
+                  <a:latin typeface="Times New Roman" panose="02020603050405020304" pitchFamily="18" charset="0"/>
+                  <a:cs typeface="Times New Roman" panose="02020603050405020304" pitchFamily="18" charset="0"/>
+                </a:rPr>
+                <a:t>13</a:t>
+              </a:r>
+              <a:endParaRPr lang="fr-FR" dirty="0">
+                <a:solidFill>
+                  <a:schemeClr val="bg1"/>
+                </a:solidFill>
+                <a:latin typeface="Times New Roman" panose="02020603050405020304" pitchFamily="18" charset="0"/>
+                <a:cs typeface="Times New Roman" panose="02020603050405020304" pitchFamily="18" charset="0"/>
+              </a:endParaRPr>
+            </a:p>
+          </p:txBody>
+        </p:sp>
+      </p:grpSp>
+      <p:grpSp>
+        <p:nvGrpSpPr>
+          <p:cNvPr id="12" name="Group 11"/>
+          <p:cNvGrpSpPr/>
+          <p:nvPr/>
+        </p:nvGrpSpPr>
+        <p:grpSpPr>
+          <a:xfrm>
+            <a:off x="3581285" y="1446311"/>
+            <a:ext cx="434176" cy="414440"/>
+            <a:chOff x="1302526" y="4999597"/>
+            <a:chExt cx="434176" cy="414440"/>
+          </a:xfrm>
+        </p:grpSpPr>
+        <p:sp>
+          <p:nvSpPr>
+            <p:cNvPr id="13" name="Oval 12"/>
+            <p:cNvSpPr/>
+            <p:nvPr/>
+          </p:nvSpPr>
+          <p:spPr>
+            <a:xfrm>
+              <a:off x="1315683" y="4999597"/>
+              <a:ext cx="407862" cy="414440"/>
+            </a:xfrm>
+            <a:prstGeom prst="ellipse">
+              <a:avLst/>
+            </a:prstGeom>
+            <a:solidFill>
+              <a:schemeClr val="dk1">
+                <a:alpha val="50000"/>
+              </a:schemeClr>
+            </a:solidFill>
+            <a:ln>
+              <a:noFill/>
+            </a:ln>
+          </p:spPr>
+          <p:style>
+            <a:lnRef idx="0">
+              <a:scrgbClr r="0" g="0" b="0"/>
+            </a:lnRef>
+            <a:fillRef idx="0">
+              <a:scrgbClr r="0" g="0" b="0"/>
+            </a:fillRef>
+            <a:effectRef idx="0">
+              <a:scrgbClr r="0" g="0" b="0"/>
+            </a:effectRef>
+            <a:fontRef idx="minor">
+              <a:schemeClr val="lt1"/>
+            </a:fontRef>
+          </p:style>
+          <p:txBody>
+            <a:bodyPr rtlCol="0" anchor="ctr"/>
+            <a:lstStyle/>
+            <a:p>
+              <a:pPr algn="ctr"/>
+              <a:endParaRPr lang="fr-FR" sz="700" dirty="0"/>
+            </a:p>
+          </p:txBody>
+        </p:sp>
+        <p:sp>
+          <p:nvSpPr>
+            <p:cNvPr id="14" name="TextBox 13"/>
+            <p:cNvSpPr txBox="1"/>
+            <p:nvPr/>
+          </p:nvSpPr>
+          <p:spPr>
+            <a:xfrm>
+              <a:off x="1302526" y="5022151"/>
+              <a:ext cx="434176" cy="369332"/>
+            </a:xfrm>
+            <a:prstGeom prst="rect">
+              <a:avLst/>
+            </a:prstGeom>
+            <a:noFill/>
+          </p:spPr>
+          <p:txBody>
+            <a:bodyPr wrap="square" rtlCol="0">
+              <a:spAutoFit/>
+            </a:bodyPr>
+            <a:lstStyle/>
+            <a:p>
+              <a:r>
+                <a:rPr lang="fr-FR" dirty="0" smtClean="0">
+                  <a:solidFill>
+                    <a:schemeClr val="bg1"/>
+                  </a:solidFill>
+                  <a:latin typeface="Times New Roman" panose="02020603050405020304" pitchFamily="18" charset="0"/>
+                  <a:cs typeface="Times New Roman" panose="02020603050405020304" pitchFamily="18" charset="0"/>
+                </a:rPr>
+                <a:t>10</a:t>
+              </a:r>
+              <a:endParaRPr lang="fr-FR" dirty="0">
+                <a:solidFill>
+                  <a:schemeClr val="bg1"/>
+                </a:solidFill>
+                <a:latin typeface="Times New Roman" panose="02020603050405020304" pitchFamily="18" charset="0"/>
+                <a:cs typeface="Times New Roman" panose="02020603050405020304" pitchFamily="18" charset="0"/>
+              </a:endParaRPr>
+            </a:p>
+          </p:txBody>
+        </p:sp>
+      </p:grpSp>
+      <p:grpSp>
+        <p:nvGrpSpPr>
+          <p:cNvPr id="15" name="Group 14"/>
+          <p:cNvGrpSpPr/>
+          <p:nvPr/>
+        </p:nvGrpSpPr>
+        <p:grpSpPr>
+          <a:xfrm>
+            <a:off x="8921430" y="1175619"/>
+            <a:ext cx="434176" cy="414440"/>
+            <a:chOff x="1302526" y="4999597"/>
+            <a:chExt cx="434176" cy="414440"/>
+          </a:xfrm>
+        </p:grpSpPr>
+        <p:sp>
+          <p:nvSpPr>
+            <p:cNvPr id="16" name="Oval 15"/>
+            <p:cNvSpPr/>
+            <p:nvPr/>
+          </p:nvSpPr>
+          <p:spPr>
+            <a:xfrm>
+              <a:off x="1315683" y="4999597"/>
+              <a:ext cx="407862" cy="414440"/>
+            </a:xfrm>
+            <a:prstGeom prst="ellipse">
+              <a:avLst/>
+            </a:prstGeom>
+            <a:solidFill>
+              <a:schemeClr val="dk1">
+                <a:alpha val="50000"/>
+              </a:schemeClr>
+            </a:solidFill>
+            <a:ln>
+              <a:noFill/>
+            </a:ln>
+          </p:spPr>
+          <p:style>
+            <a:lnRef idx="0">
+              <a:scrgbClr r="0" g="0" b="0"/>
+            </a:lnRef>
+            <a:fillRef idx="0">
+              <a:scrgbClr r="0" g="0" b="0"/>
+            </a:fillRef>
+            <a:effectRef idx="0">
+              <a:scrgbClr r="0" g="0" b="0"/>
+            </a:effectRef>
+            <a:fontRef idx="minor">
+              <a:schemeClr val="lt1"/>
+            </a:fontRef>
+          </p:style>
+          <p:txBody>
+            <a:bodyPr rtlCol="0" anchor="ctr"/>
+            <a:lstStyle/>
+            <a:p>
+              <a:pPr algn="ctr"/>
+              <a:endParaRPr lang="fr-FR" sz="700" dirty="0"/>
+            </a:p>
+          </p:txBody>
+        </p:sp>
+        <p:sp>
+          <p:nvSpPr>
+            <p:cNvPr id="17" name="TextBox 16"/>
+            <p:cNvSpPr txBox="1"/>
+            <p:nvPr/>
+          </p:nvSpPr>
+          <p:spPr>
+            <a:xfrm>
+              <a:off x="1302526" y="5022151"/>
+              <a:ext cx="434176" cy="369332"/>
+            </a:xfrm>
+            <a:prstGeom prst="rect">
+              <a:avLst/>
+            </a:prstGeom>
+            <a:noFill/>
+          </p:spPr>
+          <p:txBody>
+            <a:bodyPr wrap="square" rtlCol="0">
+              <a:spAutoFit/>
+            </a:bodyPr>
+            <a:lstStyle/>
+            <a:p>
+              <a:r>
+                <a:rPr lang="fr-FR" dirty="0" smtClean="0">
+                  <a:solidFill>
+                    <a:schemeClr val="bg1"/>
+                  </a:solidFill>
+                  <a:latin typeface="Times New Roman" panose="02020603050405020304" pitchFamily="18" charset="0"/>
+                  <a:cs typeface="Times New Roman" panose="02020603050405020304" pitchFamily="18" charset="0"/>
+                </a:rPr>
+                <a:t>14</a:t>
+              </a:r>
+              <a:endParaRPr lang="fr-FR" dirty="0">
+                <a:solidFill>
+                  <a:schemeClr val="bg1"/>
+                </a:solidFill>
+                <a:latin typeface="Times New Roman" panose="02020603050405020304" pitchFamily="18" charset="0"/>
+                <a:cs typeface="Times New Roman" panose="02020603050405020304" pitchFamily="18" charset="0"/>
+              </a:endParaRPr>
+            </a:p>
+          </p:txBody>
+        </p:sp>
+      </p:grpSp>
+      <p:grpSp>
+        <p:nvGrpSpPr>
+          <p:cNvPr id="18" name="Group 17"/>
+          <p:cNvGrpSpPr/>
+          <p:nvPr/>
+        </p:nvGrpSpPr>
+        <p:grpSpPr>
+          <a:xfrm>
+            <a:off x="6586092" y="2067971"/>
+            <a:ext cx="434176" cy="414440"/>
+            <a:chOff x="1302526" y="4999597"/>
+            <a:chExt cx="434176" cy="414440"/>
+          </a:xfrm>
+        </p:grpSpPr>
+        <p:sp>
+          <p:nvSpPr>
+            <p:cNvPr id="19" name="Oval 18"/>
+            <p:cNvSpPr/>
+            <p:nvPr/>
+          </p:nvSpPr>
+          <p:spPr>
+            <a:xfrm>
+              <a:off x="1315683" y="4999597"/>
+              <a:ext cx="407862" cy="414440"/>
+            </a:xfrm>
+            <a:prstGeom prst="ellipse">
+              <a:avLst/>
+            </a:prstGeom>
+            <a:solidFill>
+              <a:schemeClr val="dk1">
+                <a:alpha val="50000"/>
+              </a:schemeClr>
+            </a:solidFill>
+            <a:ln>
+              <a:noFill/>
+            </a:ln>
+          </p:spPr>
+          <p:style>
+            <a:lnRef idx="0">
+              <a:scrgbClr r="0" g="0" b="0"/>
+            </a:lnRef>
+            <a:fillRef idx="0">
+              <a:scrgbClr r="0" g="0" b="0"/>
+            </a:fillRef>
+            <a:effectRef idx="0">
+              <a:scrgbClr r="0" g="0" b="0"/>
+            </a:effectRef>
+            <a:fontRef idx="minor">
+              <a:schemeClr val="lt1"/>
+            </a:fontRef>
+          </p:style>
+          <p:txBody>
+            <a:bodyPr rtlCol="0" anchor="ctr"/>
+            <a:lstStyle/>
+            <a:p>
+              <a:pPr algn="ctr"/>
+              <a:endParaRPr lang="fr-FR" sz="700" dirty="0"/>
+            </a:p>
+          </p:txBody>
+        </p:sp>
+        <p:sp>
+          <p:nvSpPr>
+            <p:cNvPr id="20" name="TextBox 19"/>
+            <p:cNvSpPr txBox="1"/>
+            <p:nvPr/>
+          </p:nvSpPr>
+          <p:spPr>
+            <a:xfrm>
+              <a:off x="1302526" y="5022151"/>
+              <a:ext cx="434176" cy="369332"/>
+            </a:xfrm>
+            <a:prstGeom prst="rect">
+              <a:avLst/>
+            </a:prstGeom>
+            <a:noFill/>
+          </p:spPr>
+          <p:txBody>
+            <a:bodyPr wrap="square" rtlCol="0">
+              <a:spAutoFit/>
+            </a:bodyPr>
+            <a:lstStyle/>
+            <a:p>
+              <a:r>
+                <a:rPr lang="fr-FR" dirty="0" smtClean="0">
+                  <a:solidFill>
+                    <a:schemeClr val="bg1"/>
+                  </a:solidFill>
+                  <a:latin typeface="Times New Roman" panose="02020603050405020304" pitchFamily="18" charset="0"/>
+                  <a:cs typeface="Times New Roman" panose="02020603050405020304" pitchFamily="18" charset="0"/>
+                </a:rPr>
+                <a:t>16</a:t>
+              </a:r>
+              <a:endParaRPr lang="fr-FR" dirty="0">
+                <a:solidFill>
+                  <a:schemeClr val="bg1"/>
+                </a:solidFill>
+                <a:latin typeface="Times New Roman" panose="02020603050405020304" pitchFamily="18" charset="0"/>
+                <a:cs typeface="Times New Roman" panose="02020603050405020304" pitchFamily="18" charset="0"/>
+              </a:endParaRPr>
+            </a:p>
+          </p:txBody>
+        </p:sp>
+      </p:grpSp>
+      <p:grpSp>
+        <p:nvGrpSpPr>
+          <p:cNvPr id="21" name="Group 20"/>
+          <p:cNvGrpSpPr/>
+          <p:nvPr/>
+        </p:nvGrpSpPr>
+        <p:grpSpPr>
+          <a:xfrm>
+            <a:off x="8704342" y="3067813"/>
+            <a:ext cx="434176" cy="414440"/>
+            <a:chOff x="1302526" y="4999597"/>
+            <a:chExt cx="434176" cy="414440"/>
+          </a:xfrm>
+        </p:grpSpPr>
+        <p:sp>
+          <p:nvSpPr>
+            <p:cNvPr id="22" name="Oval 21"/>
+            <p:cNvSpPr/>
+            <p:nvPr/>
+          </p:nvSpPr>
+          <p:spPr>
+            <a:xfrm>
+              <a:off x="1315683" y="4999597"/>
+              <a:ext cx="407862" cy="414440"/>
+            </a:xfrm>
+            <a:prstGeom prst="ellipse">
+              <a:avLst/>
+            </a:prstGeom>
+            <a:solidFill>
+              <a:schemeClr val="dk1">
+                <a:alpha val="50000"/>
+              </a:schemeClr>
+            </a:solidFill>
+            <a:ln>
+              <a:noFill/>
+            </a:ln>
+          </p:spPr>
+          <p:style>
+            <a:lnRef idx="0">
+              <a:scrgbClr r="0" g="0" b="0"/>
+            </a:lnRef>
+            <a:fillRef idx="0">
+              <a:scrgbClr r="0" g="0" b="0"/>
+            </a:fillRef>
+            <a:effectRef idx="0">
+              <a:scrgbClr r="0" g="0" b="0"/>
+            </a:effectRef>
+            <a:fontRef idx="minor">
+              <a:schemeClr val="lt1"/>
+            </a:fontRef>
+          </p:style>
+          <p:txBody>
+            <a:bodyPr rtlCol="0" anchor="ctr"/>
+            <a:lstStyle/>
+            <a:p>
+              <a:pPr algn="ctr"/>
+              <a:endParaRPr lang="fr-FR" sz="700" dirty="0"/>
+            </a:p>
+          </p:txBody>
+        </p:sp>
+        <p:sp>
+          <p:nvSpPr>
+            <p:cNvPr id="23" name="TextBox 22"/>
+            <p:cNvSpPr txBox="1"/>
+            <p:nvPr/>
+          </p:nvSpPr>
+          <p:spPr>
+            <a:xfrm>
+              <a:off x="1302526" y="5022151"/>
+              <a:ext cx="434176" cy="369332"/>
+            </a:xfrm>
+            <a:prstGeom prst="rect">
+              <a:avLst/>
+            </a:prstGeom>
+            <a:noFill/>
+          </p:spPr>
+          <p:txBody>
+            <a:bodyPr wrap="square" rtlCol="0">
+              <a:spAutoFit/>
+            </a:bodyPr>
+            <a:lstStyle/>
+            <a:p>
+              <a:r>
+                <a:rPr lang="fr-FR" dirty="0" smtClean="0">
+                  <a:solidFill>
+                    <a:schemeClr val="bg1"/>
+                  </a:solidFill>
+                  <a:latin typeface="Times New Roman" panose="02020603050405020304" pitchFamily="18" charset="0"/>
+                  <a:cs typeface="Times New Roman" panose="02020603050405020304" pitchFamily="18" charset="0"/>
+                </a:rPr>
+                <a:t>17</a:t>
+              </a:r>
+              <a:endParaRPr lang="fr-FR" dirty="0">
+                <a:solidFill>
+                  <a:schemeClr val="bg1"/>
+                </a:solidFill>
+                <a:latin typeface="Times New Roman" panose="02020603050405020304" pitchFamily="18" charset="0"/>
+                <a:cs typeface="Times New Roman" panose="02020603050405020304" pitchFamily="18" charset="0"/>
+              </a:endParaRPr>
+            </a:p>
+          </p:txBody>
+        </p:sp>
+      </p:grpSp>
+      <p:grpSp>
+        <p:nvGrpSpPr>
+          <p:cNvPr id="24" name="Group 23"/>
+          <p:cNvGrpSpPr/>
+          <p:nvPr/>
+        </p:nvGrpSpPr>
+        <p:grpSpPr>
+          <a:xfrm>
+            <a:off x="2260782" y="3252479"/>
+            <a:ext cx="434176" cy="414440"/>
+            <a:chOff x="1302526" y="4999597"/>
+            <a:chExt cx="434176" cy="414440"/>
+          </a:xfrm>
+        </p:grpSpPr>
+        <p:sp>
+          <p:nvSpPr>
+            <p:cNvPr id="25" name="Oval 24"/>
+            <p:cNvSpPr/>
+            <p:nvPr/>
+          </p:nvSpPr>
+          <p:spPr>
+            <a:xfrm>
+              <a:off x="1315683" y="4999597"/>
+              <a:ext cx="407862" cy="414440"/>
+            </a:xfrm>
+            <a:prstGeom prst="ellipse">
+              <a:avLst/>
+            </a:prstGeom>
+            <a:solidFill>
+              <a:schemeClr val="dk1">
+                <a:alpha val="50000"/>
+              </a:schemeClr>
+            </a:solidFill>
+            <a:ln>
+              <a:noFill/>
+            </a:ln>
+          </p:spPr>
+          <p:style>
+            <a:lnRef idx="0">
+              <a:scrgbClr r="0" g="0" b="0"/>
+            </a:lnRef>
+            <a:fillRef idx="0">
+              <a:scrgbClr r="0" g="0" b="0"/>
+            </a:fillRef>
+            <a:effectRef idx="0">
+              <a:scrgbClr r="0" g="0" b="0"/>
+            </a:effectRef>
+            <a:fontRef idx="minor">
+              <a:schemeClr val="lt1"/>
+            </a:fontRef>
+          </p:style>
+          <p:txBody>
+            <a:bodyPr rtlCol="0" anchor="ctr"/>
+            <a:lstStyle/>
+            <a:p>
+              <a:pPr algn="ctr"/>
+              <a:endParaRPr lang="fr-FR" sz="700" dirty="0"/>
+            </a:p>
+          </p:txBody>
+        </p:sp>
+        <p:sp>
+          <p:nvSpPr>
+            <p:cNvPr id="26" name="TextBox 25"/>
+            <p:cNvSpPr txBox="1"/>
+            <p:nvPr/>
+          </p:nvSpPr>
+          <p:spPr>
+            <a:xfrm>
+              <a:off x="1302526" y="5022151"/>
+              <a:ext cx="434176" cy="369332"/>
+            </a:xfrm>
+            <a:prstGeom prst="rect">
+              <a:avLst/>
+            </a:prstGeom>
+            <a:noFill/>
+          </p:spPr>
+          <p:txBody>
+            <a:bodyPr wrap="square" rtlCol="0">
+              <a:spAutoFit/>
+            </a:bodyPr>
+            <a:lstStyle/>
+            <a:p>
+              <a:r>
+                <a:rPr lang="fr-FR" dirty="0" smtClean="0">
+                  <a:solidFill>
+                    <a:schemeClr val="bg1"/>
+                  </a:solidFill>
+                  <a:latin typeface="Times New Roman" panose="02020603050405020304" pitchFamily="18" charset="0"/>
+                  <a:cs typeface="Times New Roman" panose="02020603050405020304" pitchFamily="18" charset="0"/>
+                </a:rPr>
+                <a:t>18</a:t>
+              </a:r>
+              <a:endParaRPr lang="fr-FR" dirty="0">
+                <a:solidFill>
+                  <a:schemeClr val="bg1"/>
+                </a:solidFill>
+                <a:latin typeface="Times New Roman" panose="02020603050405020304" pitchFamily="18" charset="0"/>
+                <a:cs typeface="Times New Roman" panose="02020603050405020304" pitchFamily="18" charset="0"/>
+              </a:endParaRPr>
+            </a:p>
+          </p:txBody>
+        </p:sp>
+      </p:grpSp>
+      <p:grpSp>
+        <p:nvGrpSpPr>
+          <p:cNvPr id="27" name="Group 26"/>
+          <p:cNvGrpSpPr/>
+          <p:nvPr/>
+        </p:nvGrpSpPr>
+        <p:grpSpPr>
+          <a:xfrm>
+            <a:off x="2574353" y="2838039"/>
+            <a:ext cx="434176" cy="414440"/>
+            <a:chOff x="1302526" y="4999597"/>
+            <a:chExt cx="434176" cy="414440"/>
+          </a:xfrm>
+        </p:grpSpPr>
+        <p:sp>
+          <p:nvSpPr>
+            <p:cNvPr id="28" name="Oval 27"/>
+            <p:cNvSpPr/>
+            <p:nvPr/>
+          </p:nvSpPr>
+          <p:spPr>
+            <a:xfrm>
+              <a:off x="1315683" y="4999597"/>
+              <a:ext cx="407862" cy="414440"/>
+            </a:xfrm>
+            <a:prstGeom prst="ellipse">
+              <a:avLst/>
+            </a:prstGeom>
+            <a:solidFill>
+              <a:schemeClr val="dk1">
+                <a:alpha val="50000"/>
+              </a:schemeClr>
+            </a:solidFill>
+            <a:ln>
+              <a:noFill/>
+            </a:ln>
+          </p:spPr>
+          <p:style>
+            <a:lnRef idx="0">
+              <a:scrgbClr r="0" g="0" b="0"/>
+            </a:lnRef>
+            <a:fillRef idx="0">
+              <a:scrgbClr r="0" g="0" b="0"/>
+            </a:fillRef>
+            <a:effectRef idx="0">
+              <a:scrgbClr r="0" g="0" b="0"/>
+            </a:effectRef>
+            <a:fontRef idx="minor">
+              <a:schemeClr val="lt1"/>
+            </a:fontRef>
+          </p:style>
+          <p:txBody>
+            <a:bodyPr rtlCol="0" anchor="ctr"/>
+            <a:lstStyle/>
+            <a:p>
+              <a:pPr algn="ctr"/>
+              <a:endParaRPr lang="fr-FR" sz="700" dirty="0"/>
+            </a:p>
+          </p:txBody>
+        </p:sp>
+        <p:sp>
+          <p:nvSpPr>
+            <p:cNvPr id="29" name="TextBox 28"/>
+            <p:cNvSpPr txBox="1"/>
+            <p:nvPr/>
+          </p:nvSpPr>
+          <p:spPr>
+            <a:xfrm>
+              <a:off x="1302526" y="5022151"/>
+              <a:ext cx="434176" cy="369332"/>
+            </a:xfrm>
+            <a:prstGeom prst="rect">
+              <a:avLst/>
+            </a:prstGeom>
+            <a:noFill/>
+          </p:spPr>
+          <p:txBody>
+            <a:bodyPr wrap="square" rtlCol="0">
+              <a:spAutoFit/>
+            </a:bodyPr>
+            <a:lstStyle/>
+            <a:p>
+              <a:r>
+                <a:rPr lang="fr-FR" dirty="0" smtClean="0">
+                  <a:solidFill>
+                    <a:schemeClr val="bg1"/>
+                  </a:solidFill>
+                  <a:latin typeface="Times New Roman" panose="02020603050405020304" pitchFamily="18" charset="0"/>
+                  <a:cs typeface="Times New Roman" panose="02020603050405020304" pitchFamily="18" charset="0"/>
+                </a:rPr>
+                <a:t>19</a:t>
+              </a:r>
+              <a:endParaRPr lang="fr-FR" dirty="0">
+                <a:solidFill>
+                  <a:schemeClr val="bg1"/>
+                </a:solidFill>
+                <a:latin typeface="Times New Roman" panose="02020603050405020304" pitchFamily="18" charset="0"/>
+                <a:cs typeface="Times New Roman" panose="02020603050405020304" pitchFamily="18" charset="0"/>
+              </a:endParaRPr>
+            </a:p>
+          </p:txBody>
+        </p:sp>
+      </p:grpSp>
+    </p:spTree>
+    <p:extLst>
+      <p:ext uri="{BB962C8B-B14F-4D97-AF65-F5344CB8AC3E}">
+        <p14:creationId xmlns:p14="http://schemas.microsoft.com/office/powerpoint/2010/main" val="908374057"/>
+      </p:ext>
+    </p:extLst>
+  </p:cSld>
+  <p:clrMapOvr>
+    <a:masterClrMapping/>
+  </p:clrMapOvr>
+  <p:timing>
+    <p:tnLst>
+      <p:par>
+        <p:cTn id="1" dur="indefinite" restart="never" nodeType="tmRoot"/>
+      </p:par>
+    </p:tnLst>
+  </p:timing>
+</p:sld>
+</file>
+
 <file path=ppt/theme/theme1.xml><?xml version="1.0" encoding="utf-8"?>
 <a:theme xmlns:a="http://schemas.openxmlformats.org/drawingml/2006/main" name="Office Theme">
   <a:themeElements>

--- a/images/Num_Ouvrages.pptx
+++ b/images/Num_Ouvrages.pptx
@@ -5,8 +5,8 @@
     <p:sldMasterId id="2147483648" r:id="rId1"/>
   </p:sldMasterIdLst>
   <p:sldIdLst>
-    <p:sldId id="257" r:id="rId2"/>
-    <p:sldId id="258" r:id="rId3"/>
+    <p:sldId id="259" r:id="rId2"/>
+    <p:sldId id="260" r:id="rId3"/>
   </p:sldIdLst>
   <p:sldSz cx="12192000" cy="6858000"/>
   <p:notesSz cx="6858000" cy="9144000"/>
@@ -244,7 +244,7 @@
           <a:p>
             <a:fld id="{D3118480-AA44-4C42-AA0A-FF774FAFB055}" type="datetimeFigureOut">
               <a:rPr lang="fr-FR" smtClean="0"/>
-              <a:t>16/09/2026</a:t>
+              <a:t>18/09/2026</a:t>
             </a:fld>
             <a:endParaRPr lang="fr-FR"/>
           </a:p>
@@ -414,7 +414,7 @@
           <a:p>
             <a:fld id="{D3118480-AA44-4C42-AA0A-FF774FAFB055}" type="datetimeFigureOut">
               <a:rPr lang="fr-FR" smtClean="0"/>
-              <a:t>16/09/2026</a:t>
+              <a:t>18/09/2026</a:t>
             </a:fld>
             <a:endParaRPr lang="fr-FR"/>
           </a:p>
@@ -594,7 +594,7 @@
           <a:p>
             <a:fld id="{D3118480-AA44-4C42-AA0A-FF774FAFB055}" type="datetimeFigureOut">
               <a:rPr lang="fr-FR" smtClean="0"/>
-              <a:t>16/09/2026</a:t>
+              <a:t>18/09/2026</a:t>
             </a:fld>
             <a:endParaRPr lang="fr-FR"/>
           </a:p>
@@ -764,7 +764,7 @@
           <a:p>
             <a:fld id="{D3118480-AA44-4C42-AA0A-FF774FAFB055}" type="datetimeFigureOut">
               <a:rPr lang="fr-FR" smtClean="0"/>
-              <a:t>16/09/2026</a:t>
+              <a:t>18/09/2026</a:t>
             </a:fld>
             <a:endParaRPr lang="fr-FR"/>
           </a:p>
@@ -1010,7 +1010,7 @@
           <a:p>
             <a:fld id="{D3118480-AA44-4C42-AA0A-FF774FAFB055}" type="datetimeFigureOut">
               <a:rPr lang="fr-FR" smtClean="0"/>
-              <a:t>16/09/2026</a:t>
+              <a:t>18/09/2026</a:t>
             </a:fld>
             <a:endParaRPr lang="fr-FR"/>
           </a:p>
@@ -1242,7 +1242,7 @@
           <a:p>
             <a:fld id="{D3118480-AA44-4C42-AA0A-FF774FAFB055}" type="datetimeFigureOut">
               <a:rPr lang="fr-FR" smtClean="0"/>
-              <a:t>16/09/2026</a:t>
+              <a:t>18/09/2026</a:t>
             </a:fld>
             <a:endParaRPr lang="fr-FR"/>
           </a:p>
@@ -1609,7 +1609,7 @@
           <a:p>
             <a:fld id="{D3118480-AA44-4C42-AA0A-FF774FAFB055}" type="datetimeFigureOut">
               <a:rPr lang="fr-FR" smtClean="0"/>
-              <a:t>16/09/2026</a:t>
+              <a:t>18/09/2026</a:t>
             </a:fld>
             <a:endParaRPr lang="fr-FR"/>
           </a:p>
@@ -1727,7 +1727,7 @@
           <a:p>
             <a:fld id="{D3118480-AA44-4C42-AA0A-FF774FAFB055}" type="datetimeFigureOut">
               <a:rPr lang="fr-FR" smtClean="0"/>
-              <a:t>16/09/2026</a:t>
+              <a:t>18/09/2026</a:t>
             </a:fld>
             <a:endParaRPr lang="fr-FR"/>
           </a:p>
@@ -1822,7 +1822,7 @@
           <a:p>
             <a:fld id="{D3118480-AA44-4C42-AA0A-FF774FAFB055}" type="datetimeFigureOut">
               <a:rPr lang="fr-FR" smtClean="0"/>
-              <a:t>16/09/2026</a:t>
+              <a:t>18/09/2026</a:t>
             </a:fld>
             <a:endParaRPr lang="fr-FR"/>
           </a:p>
@@ -2099,7 +2099,7 @@
           <a:p>
             <a:fld id="{D3118480-AA44-4C42-AA0A-FF774FAFB055}" type="datetimeFigureOut">
               <a:rPr lang="fr-FR" smtClean="0"/>
-              <a:t>16/09/2026</a:t>
+              <a:t>18/09/2026</a:t>
             </a:fld>
             <a:endParaRPr lang="fr-FR"/>
           </a:p>
@@ -2352,7 +2352,7 @@
           <a:p>
             <a:fld id="{D3118480-AA44-4C42-AA0A-FF774FAFB055}" type="datetimeFigureOut">
               <a:rPr lang="fr-FR" smtClean="0"/>
-              <a:t>16/09/2026</a:t>
+              <a:t>18/09/2026</a:t>
             </a:fld>
             <a:endParaRPr lang="fr-FR"/>
           </a:p>
@@ -2565,7 +2565,7 @@
           <a:p>
             <a:fld id="{D3118480-AA44-4C42-AA0A-FF774FAFB055}" type="datetimeFigureOut">
               <a:rPr lang="fr-FR" smtClean="0"/>
-              <a:t>16/09/2026</a:t>
+              <a:t>18/09/2026</a:t>
             </a:fld>
             <a:endParaRPr lang="fr-FR"/>
           </a:p>
@@ -2979,20 +2979,20 @@
           <p:nvPr/>
         </p:nvPicPr>
         <p:blipFill rotWithShape="1">
-          <a:blip r:embed="rId2">
+          <a:blip r:embed="rId2" cstate="print">
             <a:extLst>
               <a:ext uri="{28A0092B-C50C-407E-A947-70E740481C1C}">
                 <a14:useLocalDpi xmlns:a14="http://schemas.microsoft.com/office/drawing/2010/main" val="0"/>
               </a:ext>
             </a:extLst>
           </a:blip>
-          <a:srcRect b="31648"/>
+          <a:srcRect l="-719" t="25474" r="1" b="23997"/>
           <a:stretch/>
         </p:blipFill>
         <p:spPr>
           <a:xfrm>
-            <a:off x="0" y="3514"/>
-            <a:ext cx="12192000" cy="4682786"/>
+            <a:off x="-85519" y="0"/>
+            <a:ext cx="12254061" cy="4348333"/>
           </a:xfrm>
           <a:prstGeom prst="rect">
             <a:avLst/>
@@ -3007,7 +3007,7 @@
         </p:nvGrpSpPr>
         <p:grpSpPr>
           <a:xfrm>
-            <a:off x="6210025" y="1401203"/>
+            <a:off x="6320430" y="608269"/>
             <a:ext cx="434176" cy="414440"/>
             <a:chOff x="1302526" y="4999597"/>
             <a:chExt cx="434176" cy="414440"/>
@@ -3089,7 +3089,7 @@
                   <a:latin typeface="Times New Roman" panose="02020603050405020304" pitchFamily="18" charset="0"/>
                   <a:cs typeface="Times New Roman" panose="02020603050405020304" pitchFamily="18" charset="0"/>
                 </a:rPr>
-                <a:t>13</a:t>
+                <a:t>08</a:t>
               </a:r>
               <a:endParaRPr lang="fr-FR" dirty="0">
                 <a:solidFill>
@@ -3110,7 +3110,7 @@
         </p:nvGrpSpPr>
         <p:grpSpPr>
           <a:xfrm>
-            <a:off x="2948227" y="1290937"/>
+            <a:off x="8357216" y="608269"/>
             <a:ext cx="434176" cy="414440"/>
             <a:chOff x="1302526" y="4999597"/>
             <a:chExt cx="434176" cy="414440"/>
@@ -3213,7 +3213,7 @@
         </p:nvGrpSpPr>
         <p:grpSpPr>
           <a:xfrm>
-            <a:off x="9645056" y="757614"/>
+            <a:off x="3785216" y="241484"/>
             <a:ext cx="434176" cy="414440"/>
             <a:chOff x="1302526" y="4999597"/>
             <a:chExt cx="434176" cy="414440"/>
@@ -3295,7 +3295,7 @@
                   <a:latin typeface="Times New Roman" panose="02020603050405020304" pitchFamily="18" charset="0"/>
                   <a:cs typeface="Times New Roman" panose="02020603050405020304" pitchFamily="18" charset="0"/>
                 </a:rPr>
-                <a:t>14</a:t>
+                <a:t>15</a:t>
               </a:r>
               <a:endParaRPr lang="fr-FR" dirty="0">
                 <a:solidFill>
@@ -3316,9 +3316,9 @@
         </p:nvGrpSpPr>
         <p:grpSpPr>
           <a:xfrm>
-            <a:off x="7355767" y="2126474"/>
+            <a:off x="6382161" y="2798175"/>
             <a:ext cx="434176" cy="414440"/>
-            <a:chOff x="1302526" y="4999597"/>
+            <a:chOff x="1309104" y="4999597"/>
             <a:chExt cx="434176" cy="414440"/>
           </a:xfrm>
         </p:grpSpPr>
@@ -3376,7 +3376,7 @@
           </p:nvSpPr>
           <p:spPr>
             <a:xfrm>
-              <a:off x="1302526" y="5022151"/>
+              <a:off x="1309104" y="5022151"/>
               <a:ext cx="434176" cy="369332"/>
             </a:xfrm>
             <a:prstGeom prst="rect">
@@ -3398,7 +3398,7 @@
                   <a:latin typeface="Times New Roman" panose="02020603050405020304" pitchFamily="18" charset="0"/>
                   <a:cs typeface="Times New Roman" panose="02020603050405020304" pitchFamily="18" charset="0"/>
                 </a:rPr>
-                <a:t>16</a:t>
+                <a:t>29</a:t>
               </a:r>
               <a:endParaRPr lang="fr-FR" dirty="0">
                 <a:solidFill>
@@ -3419,9 +3419,9 @@
         </p:nvGrpSpPr>
         <p:grpSpPr>
           <a:xfrm>
-            <a:off x="9645056" y="2941649"/>
+            <a:off x="8079392" y="3212615"/>
             <a:ext cx="434176" cy="414440"/>
-            <a:chOff x="1302526" y="4999597"/>
+            <a:chOff x="1309104" y="4999597"/>
             <a:chExt cx="434176" cy="414440"/>
           </a:xfrm>
         </p:grpSpPr>
@@ -3479,6 +3479,175 @@
           </p:nvSpPr>
           <p:spPr>
             <a:xfrm>
+              <a:off x="1309104" y="5022151"/>
+              <a:ext cx="434176" cy="369332"/>
+            </a:xfrm>
+            <a:prstGeom prst="rect">
+              <a:avLst/>
+            </a:prstGeom>
+            <a:noFill/>
+          </p:spPr>
+          <p:txBody>
+            <a:bodyPr wrap="square" rtlCol="0">
+              <a:spAutoFit/>
+            </a:bodyPr>
+            <a:lstStyle/>
+            <a:p>
+              <a:r>
+                <a:rPr lang="fr-FR" dirty="0" smtClean="0">
+                  <a:solidFill>
+                    <a:schemeClr val="bg1"/>
+                  </a:solidFill>
+                  <a:latin typeface="Times New Roman" panose="02020603050405020304" pitchFamily="18" charset="0"/>
+                  <a:cs typeface="Times New Roman" panose="02020603050405020304" pitchFamily="18" charset="0"/>
+                </a:rPr>
+                <a:t>35</a:t>
+              </a:r>
+              <a:endParaRPr lang="fr-FR" dirty="0">
+                <a:solidFill>
+                  <a:schemeClr val="bg1"/>
+                </a:solidFill>
+                <a:latin typeface="Times New Roman" panose="02020603050405020304" pitchFamily="18" charset="0"/>
+                <a:cs typeface="Times New Roman" panose="02020603050405020304" pitchFamily="18" charset="0"/>
+              </a:endParaRPr>
+            </a:p>
+          </p:txBody>
+        </p:sp>
+      </p:grpSp>
+    </p:spTree>
+    <p:extLst>
+      <p:ext uri="{BB962C8B-B14F-4D97-AF65-F5344CB8AC3E}">
+        <p14:creationId xmlns:p14="http://schemas.microsoft.com/office/powerpoint/2010/main" val="896382164"/>
+      </p:ext>
+    </p:extLst>
+  </p:cSld>
+  <p:clrMapOvr>
+    <a:masterClrMapping/>
+  </p:clrMapOvr>
+  <p:timing>
+    <p:tnLst>
+      <p:par>
+        <p:cTn id="1" dur="indefinite" restart="never" nodeType="tmRoot"/>
+      </p:par>
+    </p:tnLst>
+  </p:timing>
+</p:sld>
+</file>
+
+<file path=ppt/slides/slide2.xml><?xml version="1.0" encoding="utf-8"?>
+<p:sld xmlns:a="http://schemas.openxmlformats.org/drawingml/2006/main" xmlns:r="http://schemas.openxmlformats.org/officeDocument/2006/relationships" xmlns:p="http://schemas.openxmlformats.org/presentationml/2006/main">
+  <p:cSld>
+    <p:spTree>
+      <p:nvGrpSpPr>
+        <p:cNvPr id="1" name=""/>
+        <p:cNvGrpSpPr/>
+        <p:nvPr/>
+      </p:nvGrpSpPr>
+      <p:grpSpPr>
+        <a:xfrm>
+          <a:off x="0" y="0"/>
+          <a:ext cx="0" cy="0"/>
+          <a:chOff x="0" y="0"/>
+          <a:chExt cx="0" cy="0"/>
+        </a:xfrm>
+      </p:grpSpPr>
+      <p:pic>
+        <p:nvPicPr>
+          <p:cNvPr id="2" name="Picture 1"/>
+          <p:cNvPicPr>
+            <a:picLocks noChangeAspect="1"/>
+          </p:cNvPicPr>
+          <p:nvPr/>
+        </p:nvPicPr>
+        <p:blipFill rotWithShape="1">
+          <a:blip r:embed="rId2" cstate="print">
+            <a:extLst>
+              <a:ext uri="{28A0092B-C50C-407E-A947-70E740481C1C}">
+                <a14:useLocalDpi xmlns:a14="http://schemas.microsoft.com/office/drawing/2010/main" val="0"/>
+              </a:ext>
+            </a:extLst>
+          </a:blip>
+          <a:srcRect l="3572" t="21779" r="-544" b="29266"/>
+          <a:stretch/>
+        </p:blipFill>
+        <p:spPr>
+          <a:xfrm>
+            <a:off x="31980" y="14611"/>
+            <a:ext cx="12136562" cy="4333722"/>
+          </a:xfrm>
+          <a:prstGeom prst="rect">
+            <a:avLst/>
+          </a:prstGeom>
+        </p:spPr>
+      </p:pic>
+      <p:grpSp>
+        <p:nvGrpSpPr>
+          <p:cNvPr id="7" name="Group 6"/>
+          <p:cNvGrpSpPr/>
+          <p:nvPr/>
+        </p:nvGrpSpPr>
+        <p:grpSpPr>
+          <a:xfrm>
+            <a:off x="6158495" y="714949"/>
+            <a:ext cx="434176" cy="414440"/>
+            <a:chOff x="1302526" y="4999597"/>
+            <a:chExt cx="434176" cy="414440"/>
+          </a:xfrm>
+        </p:grpSpPr>
+        <p:sp>
+          <p:nvSpPr>
+            <p:cNvPr id="5" name="Oval 4"/>
+            <p:cNvSpPr/>
+            <p:nvPr/>
+          </p:nvSpPr>
+          <p:spPr>
+            <a:xfrm>
+              <a:off x="1315683" y="4999597"/>
+              <a:ext cx="407862" cy="414440"/>
+            </a:xfrm>
+            <a:prstGeom prst="ellipse">
+              <a:avLst/>
+            </a:prstGeom>
+            <a:solidFill>
+              <a:schemeClr val="dk1">
+                <a:alpha val="50000"/>
+              </a:schemeClr>
+            </a:solidFill>
+            <a:ln>
+              <a:noFill/>
+            </a:ln>
+          </p:spPr>
+          <p:style>
+            <a:lnRef idx="0">
+              <a:scrgbClr r="0" g="0" b="0"/>
+            </a:lnRef>
+            <a:fillRef idx="0">
+              <a:scrgbClr r="0" g="0" b="0"/>
+            </a:fillRef>
+            <a:effectRef idx="0">
+              <a:scrgbClr r="0" g="0" b="0"/>
+            </a:effectRef>
+            <a:fontRef idx="minor">
+              <a:schemeClr val="lt1"/>
+            </a:fontRef>
+          </p:style>
+          <p:txBody>
+            <a:bodyPr rtlCol="0" anchor="ctr"/>
+            <a:lstStyle/>
+            <a:p>
+              <a:pPr algn="ctr"/>
+              <a:endParaRPr lang="fr-FR" sz="700" dirty="0"/>
+            </a:p>
+          </p:txBody>
+        </p:sp>
+        <p:sp>
+          <p:nvSpPr>
+            <p:cNvPr id="6" name="TextBox 5"/>
+            <p:cNvSpPr txBox="1"/>
+            <p:nvPr/>
+          </p:nvSpPr>
+          <p:spPr>
+            <a:xfrm>
               <a:off x="1302526" y="5022151"/>
               <a:ext cx="434176" cy="369332"/>
             </a:xfrm>
@@ -3501,7 +3670,419 @@
                   <a:latin typeface="Times New Roman" panose="02020603050405020304" pitchFamily="18" charset="0"/>
                   <a:cs typeface="Times New Roman" panose="02020603050405020304" pitchFamily="18" charset="0"/>
                 </a:rPr>
-                <a:t>17</a:t>
+                <a:t>08</a:t>
+              </a:r>
+              <a:endParaRPr lang="fr-FR" dirty="0">
+                <a:solidFill>
+                  <a:schemeClr val="bg1"/>
+                </a:solidFill>
+                <a:latin typeface="Times New Roman" panose="02020603050405020304" pitchFamily="18" charset="0"/>
+                <a:cs typeface="Times New Roman" panose="02020603050405020304" pitchFamily="18" charset="0"/>
+              </a:endParaRPr>
+            </a:p>
+          </p:txBody>
+        </p:sp>
+      </p:grpSp>
+      <p:grpSp>
+        <p:nvGrpSpPr>
+          <p:cNvPr id="12" name="Group 11"/>
+          <p:cNvGrpSpPr/>
+          <p:nvPr/>
+        </p:nvGrpSpPr>
+        <p:grpSpPr>
+          <a:xfrm>
+            <a:off x="3122440" y="1669496"/>
+            <a:ext cx="434176" cy="414440"/>
+            <a:chOff x="1302526" y="4999597"/>
+            <a:chExt cx="434176" cy="414440"/>
+          </a:xfrm>
+        </p:grpSpPr>
+        <p:sp>
+          <p:nvSpPr>
+            <p:cNvPr id="13" name="Oval 12"/>
+            <p:cNvSpPr/>
+            <p:nvPr/>
+          </p:nvSpPr>
+          <p:spPr>
+            <a:xfrm>
+              <a:off x="1315683" y="4999597"/>
+              <a:ext cx="407862" cy="414440"/>
+            </a:xfrm>
+            <a:prstGeom prst="ellipse">
+              <a:avLst/>
+            </a:prstGeom>
+            <a:solidFill>
+              <a:schemeClr val="dk1">
+                <a:alpha val="50000"/>
+              </a:schemeClr>
+            </a:solidFill>
+            <a:ln>
+              <a:noFill/>
+            </a:ln>
+          </p:spPr>
+          <p:style>
+            <a:lnRef idx="0">
+              <a:scrgbClr r="0" g="0" b="0"/>
+            </a:lnRef>
+            <a:fillRef idx="0">
+              <a:scrgbClr r="0" g="0" b="0"/>
+            </a:fillRef>
+            <a:effectRef idx="0">
+              <a:scrgbClr r="0" g="0" b="0"/>
+            </a:effectRef>
+            <a:fontRef idx="minor">
+              <a:schemeClr val="lt1"/>
+            </a:fontRef>
+          </p:style>
+          <p:txBody>
+            <a:bodyPr rtlCol="0" anchor="ctr"/>
+            <a:lstStyle/>
+            <a:p>
+              <a:pPr algn="ctr"/>
+              <a:endParaRPr lang="fr-FR" sz="700" dirty="0"/>
+            </a:p>
+          </p:txBody>
+        </p:sp>
+        <p:sp>
+          <p:nvSpPr>
+            <p:cNvPr id="14" name="TextBox 13"/>
+            <p:cNvSpPr txBox="1"/>
+            <p:nvPr/>
+          </p:nvSpPr>
+          <p:spPr>
+            <a:xfrm>
+              <a:off x="1302526" y="5022151"/>
+              <a:ext cx="434176" cy="369332"/>
+            </a:xfrm>
+            <a:prstGeom prst="rect">
+              <a:avLst/>
+            </a:prstGeom>
+            <a:noFill/>
+          </p:spPr>
+          <p:txBody>
+            <a:bodyPr wrap="square" rtlCol="0">
+              <a:spAutoFit/>
+            </a:bodyPr>
+            <a:lstStyle/>
+            <a:p>
+              <a:r>
+                <a:rPr lang="fr-FR" dirty="0" smtClean="0">
+                  <a:solidFill>
+                    <a:schemeClr val="bg1"/>
+                  </a:solidFill>
+                  <a:latin typeface="Times New Roman" panose="02020603050405020304" pitchFamily="18" charset="0"/>
+                  <a:cs typeface="Times New Roman" panose="02020603050405020304" pitchFamily="18" charset="0"/>
+                </a:rPr>
+                <a:t>42</a:t>
+              </a:r>
+              <a:endParaRPr lang="fr-FR" dirty="0">
+                <a:solidFill>
+                  <a:schemeClr val="bg1"/>
+                </a:solidFill>
+                <a:latin typeface="Times New Roman" panose="02020603050405020304" pitchFamily="18" charset="0"/>
+                <a:cs typeface="Times New Roman" panose="02020603050405020304" pitchFamily="18" charset="0"/>
+              </a:endParaRPr>
+            </a:p>
+          </p:txBody>
+        </p:sp>
+      </p:grpSp>
+      <p:grpSp>
+        <p:nvGrpSpPr>
+          <p:cNvPr id="15" name="Group 14"/>
+          <p:cNvGrpSpPr/>
+          <p:nvPr/>
+        </p:nvGrpSpPr>
+        <p:grpSpPr>
+          <a:xfrm>
+            <a:off x="3474879" y="1293044"/>
+            <a:ext cx="434176" cy="414440"/>
+            <a:chOff x="1302526" y="4999597"/>
+            <a:chExt cx="434176" cy="414440"/>
+          </a:xfrm>
+        </p:grpSpPr>
+        <p:sp>
+          <p:nvSpPr>
+            <p:cNvPr id="16" name="Oval 15"/>
+            <p:cNvSpPr/>
+            <p:nvPr/>
+          </p:nvSpPr>
+          <p:spPr>
+            <a:xfrm>
+              <a:off x="1315683" y="4999597"/>
+              <a:ext cx="407862" cy="414440"/>
+            </a:xfrm>
+            <a:prstGeom prst="ellipse">
+              <a:avLst/>
+            </a:prstGeom>
+            <a:solidFill>
+              <a:schemeClr val="dk1">
+                <a:alpha val="50000"/>
+              </a:schemeClr>
+            </a:solidFill>
+            <a:ln>
+              <a:noFill/>
+            </a:ln>
+          </p:spPr>
+          <p:style>
+            <a:lnRef idx="0">
+              <a:scrgbClr r="0" g="0" b="0"/>
+            </a:lnRef>
+            <a:fillRef idx="0">
+              <a:scrgbClr r="0" g="0" b="0"/>
+            </a:fillRef>
+            <a:effectRef idx="0">
+              <a:scrgbClr r="0" g="0" b="0"/>
+            </a:effectRef>
+            <a:fontRef idx="minor">
+              <a:schemeClr val="lt1"/>
+            </a:fontRef>
+          </p:style>
+          <p:txBody>
+            <a:bodyPr rtlCol="0" anchor="ctr"/>
+            <a:lstStyle/>
+            <a:p>
+              <a:pPr algn="ctr"/>
+              <a:endParaRPr lang="fr-FR" sz="700" dirty="0"/>
+            </a:p>
+          </p:txBody>
+        </p:sp>
+        <p:sp>
+          <p:nvSpPr>
+            <p:cNvPr id="17" name="TextBox 16"/>
+            <p:cNvSpPr txBox="1"/>
+            <p:nvPr/>
+          </p:nvSpPr>
+          <p:spPr>
+            <a:xfrm>
+              <a:off x="1302526" y="5022151"/>
+              <a:ext cx="434176" cy="369332"/>
+            </a:xfrm>
+            <a:prstGeom prst="rect">
+              <a:avLst/>
+            </a:prstGeom>
+            <a:noFill/>
+          </p:spPr>
+          <p:txBody>
+            <a:bodyPr wrap="square" rtlCol="0">
+              <a:spAutoFit/>
+            </a:bodyPr>
+            <a:lstStyle/>
+            <a:p>
+              <a:r>
+                <a:rPr lang="fr-FR" dirty="0" smtClean="0">
+                  <a:solidFill>
+                    <a:schemeClr val="bg1"/>
+                  </a:solidFill>
+                  <a:latin typeface="Times New Roman" panose="02020603050405020304" pitchFamily="18" charset="0"/>
+                  <a:cs typeface="Times New Roman" panose="02020603050405020304" pitchFamily="18" charset="0"/>
+                </a:rPr>
+                <a:t>43</a:t>
+              </a:r>
+              <a:endParaRPr lang="fr-FR" dirty="0">
+                <a:solidFill>
+                  <a:schemeClr val="bg1"/>
+                </a:solidFill>
+                <a:latin typeface="Times New Roman" panose="02020603050405020304" pitchFamily="18" charset="0"/>
+                <a:cs typeface="Times New Roman" panose="02020603050405020304" pitchFamily="18" charset="0"/>
+              </a:endParaRPr>
+            </a:p>
+          </p:txBody>
+        </p:sp>
+      </p:grpSp>
+      <p:grpSp>
+        <p:nvGrpSpPr>
+          <p:cNvPr id="18" name="Group 17"/>
+          <p:cNvGrpSpPr/>
+          <p:nvPr/>
+        </p:nvGrpSpPr>
+        <p:grpSpPr>
+          <a:xfrm>
+            <a:off x="6362426" y="2394315"/>
+            <a:ext cx="434176" cy="414440"/>
+            <a:chOff x="1309104" y="4999597"/>
+            <a:chExt cx="434176" cy="414440"/>
+          </a:xfrm>
+        </p:grpSpPr>
+        <p:sp>
+          <p:nvSpPr>
+            <p:cNvPr id="19" name="Oval 18"/>
+            <p:cNvSpPr/>
+            <p:nvPr/>
+          </p:nvSpPr>
+          <p:spPr>
+            <a:xfrm>
+              <a:off x="1315683" y="4999597"/>
+              <a:ext cx="407862" cy="414440"/>
+            </a:xfrm>
+            <a:prstGeom prst="ellipse">
+              <a:avLst/>
+            </a:prstGeom>
+            <a:solidFill>
+              <a:schemeClr val="dk1">
+                <a:alpha val="50000"/>
+              </a:schemeClr>
+            </a:solidFill>
+            <a:ln>
+              <a:noFill/>
+            </a:ln>
+          </p:spPr>
+          <p:style>
+            <a:lnRef idx="0">
+              <a:scrgbClr r="0" g="0" b="0"/>
+            </a:lnRef>
+            <a:fillRef idx="0">
+              <a:scrgbClr r="0" g="0" b="0"/>
+            </a:fillRef>
+            <a:effectRef idx="0">
+              <a:scrgbClr r="0" g="0" b="0"/>
+            </a:effectRef>
+            <a:fontRef idx="minor">
+              <a:schemeClr val="lt1"/>
+            </a:fontRef>
+          </p:style>
+          <p:txBody>
+            <a:bodyPr rtlCol="0" anchor="ctr"/>
+            <a:lstStyle/>
+            <a:p>
+              <a:pPr algn="ctr"/>
+              <a:endParaRPr lang="fr-FR" sz="700" dirty="0"/>
+            </a:p>
+          </p:txBody>
+        </p:sp>
+        <p:sp>
+          <p:nvSpPr>
+            <p:cNvPr id="20" name="TextBox 19"/>
+            <p:cNvSpPr txBox="1"/>
+            <p:nvPr/>
+          </p:nvSpPr>
+          <p:spPr>
+            <a:xfrm>
+              <a:off x="1309104" y="5022151"/>
+              <a:ext cx="434176" cy="369332"/>
+            </a:xfrm>
+            <a:prstGeom prst="rect">
+              <a:avLst/>
+            </a:prstGeom>
+            <a:noFill/>
+          </p:spPr>
+          <p:txBody>
+            <a:bodyPr wrap="square" rtlCol="0">
+              <a:spAutoFit/>
+            </a:bodyPr>
+            <a:lstStyle/>
+            <a:p>
+              <a:r>
+                <a:rPr lang="fr-FR" dirty="0" smtClean="0">
+                  <a:solidFill>
+                    <a:schemeClr val="bg1"/>
+                  </a:solidFill>
+                  <a:latin typeface="Times New Roman" panose="02020603050405020304" pitchFamily="18" charset="0"/>
+                  <a:cs typeface="Times New Roman" panose="02020603050405020304" pitchFamily="18" charset="0"/>
+                </a:rPr>
+                <a:t>30</a:t>
+              </a:r>
+              <a:endParaRPr lang="fr-FR" dirty="0">
+                <a:solidFill>
+                  <a:schemeClr val="bg1"/>
+                </a:solidFill>
+                <a:latin typeface="Times New Roman" panose="02020603050405020304" pitchFamily="18" charset="0"/>
+                <a:cs typeface="Times New Roman" panose="02020603050405020304" pitchFamily="18" charset="0"/>
+              </a:endParaRPr>
+            </a:p>
+          </p:txBody>
+        </p:sp>
+      </p:grpSp>
+      <p:grpSp>
+        <p:nvGrpSpPr>
+          <p:cNvPr id="21" name="Group 20"/>
+          <p:cNvGrpSpPr/>
+          <p:nvPr/>
+        </p:nvGrpSpPr>
+        <p:grpSpPr>
+          <a:xfrm>
+            <a:off x="8056532" y="2694455"/>
+            <a:ext cx="434176" cy="414440"/>
+            <a:chOff x="1309104" y="4999597"/>
+            <a:chExt cx="434176" cy="414440"/>
+          </a:xfrm>
+        </p:grpSpPr>
+        <p:sp>
+          <p:nvSpPr>
+            <p:cNvPr id="22" name="Oval 21"/>
+            <p:cNvSpPr/>
+            <p:nvPr/>
+          </p:nvSpPr>
+          <p:spPr>
+            <a:xfrm>
+              <a:off x="1315683" y="4999597"/>
+              <a:ext cx="407862" cy="414440"/>
+            </a:xfrm>
+            <a:prstGeom prst="ellipse">
+              <a:avLst/>
+            </a:prstGeom>
+            <a:solidFill>
+              <a:schemeClr val="dk1">
+                <a:alpha val="50000"/>
+              </a:schemeClr>
+            </a:solidFill>
+            <a:ln>
+              <a:noFill/>
+            </a:ln>
+          </p:spPr>
+          <p:style>
+            <a:lnRef idx="0">
+              <a:scrgbClr r="0" g="0" b="0"/>
+            </a:lnRef>
+            <a:fillRef idx="0">
+              <a:scrgbClr r="0" g="0" b="0"/>
+            </a:fillRef>
+            <a:effectRef idx="0">
+              <a:scrgbClr r="0" g="0" b="0"/>
+            </a:effectRef>
+            <a:fontRef idx="minor">
+              <a:schemeClr val="lt1"/>
+            </a:fontRef>
+          </p:style>
+          <p:txBody>
+            <a:bodyPr rtlCol="0" anchor="ctr"/>
+            <a:lstStyle/>
+            <a:p>
+              <a:pPr algn="ctr"/>
+              <a:endParaRPr lang="fr-FR" sz="700" dirty="0"/>
+            </a:p>
+          </p:txBody>
+        </p:sp>
+        <p:sp>
+          <p:nvSpPr>
+            <p:cNvPr id="23" name="TextBox 22"/>
+            <p:cNvSpPr txBox="1"/>
+            <p:nvPr/>
+          </p:nvSpPr>
+          <p:spPr>
+            <a:xfrm>
+              <a:off x="1309104" y="5022151"/>
+              <a:ext cx="434176" cy="369332"/>
+            </a:xfrm>
+            <a:prstGeom prst="rect">
+              <a:avLst/>
+            </a:prstGeom>
+            <a:noFill/>
+          </p:spPr>
+          <p:txBody>
+            <a:bodyPr wrap="square" rtlCol="0">
+              <a:spAutoFit/>
+            </a:bodyPr>
+            <a:lstStyle/>
+            <a:p>
+              <a:r>
+                <a:rPr lang="fr-FR" dirty="0" smtClean="0">
+                  <a:solidFill>
+                    <a:schemeClr val="bg1"/>
+                  </a:solidFill>
+                  <a:latin typeface="Times New Roman" panose="02020603050405020304" pitchFamily="18" charset="0"/>
+                  <a:cs typeface="Times New Roman" panose="02020603050405020304" pitchFamily="18" charset="0"/>
+                </a:rPr>
+                <a:t>36</a:t>
               </a:r>
               <a:endParaRPr lang="fr-FR" dirty="0">
                 <a:solidFill>
@@ -3522,7 +4103,7 @@
         </p:nvGrpSpPr>
         <p:grpSpPr>
           <a:xfrm>
-            <a:off x="1491107" y="3627449"/>
+            <a:off x="2759738" y="2032568"/>
             <a:ext cx="434176" cy="414440"/>
             <a:chOff x="1302526" y="4999597"/>
             <a:chExt cx="434176" cy="414440"/>
@@ -3604,110 +4185,7 @@
                   <a:latin typeface="Times New Roman" panose="02020603050405020304" pitchFamily="18" charset="0"/>
                   <a:cs typeface="Times New Roman" panose="02020603050405020304" pitchFamily="18" charset="0"/>
                 </a:rPr>
-                <a:t>18</a:t>
-              </a:r>
-              <a:endParaRPr lang="fr-FR" dirty="0">
-                <a:solidFill>
-                  <a:schemeClr val="bg1"/>
-                </a:solidFill>
-                <a:latin typeface="Times New Roman" panose="02020603050405020304" pitchFamily="18" charset="0"/>
-                <a:cs typeface="Times New Roman" panose="02020603050405020304" pitchFamily="18" charset="0"/>
-              </a:endParaRPr>
-            </a:p>
-          </p:txBody>
-        </p:sp>
-      </p:grpSp>
-      <p:grpSp>
-        <p:nvGrpSpPr>
-          <p:cNvPr id="27" name="Group 26"/>
-          <p:cNvGrpSpPr/>
-          <p:nvPr/>
-        </p:nvGrpSpPr>
-        <p:grpSpPr>
-          <a:xfrm>
-            <a:off x="1679689" y="3037114"/>
-            <a:ext cx="434176" cy="414440"/>
-            <a:chOff x="1302526" y="4999597"/>
-            <a:chExt cx="434176" cy="414440"/>
-          </a:xfrm>
-        </p:grpSpPr>
-        <p:sp>
-          <p:nvSpPr>
-            <p:cNvPr id="28" name="Oval 27"/>
-            <p:cNvSpPr/>
-            <p:nvPr/>
-          </p:nvSpPr>
-          <p:spPr>
-            <a:xfrm>
-              <a:off x="1315683" y="4999597"/>
-              <a:ext cx="407862" cy="414440"/>
-            </a:xfrm>
-            <a:prstGeom prst="ellipse">
-              <a:avLst/>
-            </a:prstGeom>
-            <a:solidFill>
-              <a:schemeClr val="dk1">
-                <a:alpha val="50000"/>
-              </a:schemeClr>
-            </a:solidFill>
-            <a:ln>
-              <a:noFill/>
-            </a:ln>
-          </p:spPr>
-          <p:style>
-            <a:lnRef idx="0">
-              <a:scrgbClr r="0" g="0" b="0"/>
-            </a:lnRef>
-            <a:fillRef idx="0">
-              <a:scrgbClr r="0" g="0" b="0"/>
-            </a:fillRef>
-            <a:effectRef idx="0">
-              <a:scrgbClr r="0" g="0" b="0"/>
-            </a:effectRef>
-            <a:fontRef idx="minor">
-              <a:schemeClr val="lt1"/>
-            </a:fontRef>
-          </p:style>
-          <p:txBody>
-            <a:bodyPr rtlCol="0" anchor="ctr"/>
-            <a:lstStyle/>
-            <a:p>
-              <a:pPr algn="ctr"/>
-              <a:endParaRPr lang="fr-FR" sz="700" dirty="0"/>
-            </a:p>
-          </p:txBody>
-        </p:sp>
-        <p:sp>
-          <p:nvSpPr>
-            <p:cNvPr id="29" name="TextBox 28"/>
-            <p:cNvSpPr txBox="1"/>
-            <p:nvPr/>
-          </p:nvSpPr>
-          <p:spPr>
-            <a:xfrm>
-              <a:off x="1302526" y="5022151"/>
-              <a:ext cx="434176" cy="369332"/>
-            </a:xfrm>
-            <a:prstGeom prst="rect">
-              <a:avLst/>
-            </a:prstGeom>
-            <a:noFill/>
-          </p:spPr>
-          <p:txBody>
-            <a:bodyPr wrap="square" rtlCol="0">
-              <a:spAutoFit/>
-            </a:bodyPr>
-            <a:lstStyle/>
-            <a:p>
-              <a:r>
-                <a:rPr lang="fr-FR" dirty="0" smtClean="0">
-                  <a:solidFill>
-                    <a:schemeClr val="bg1"/>
-                  </a:solidFill>
-                  <a:latin typeface="Times New Roman" panose="02020603050405020304" pitchFamily="18" charset="0"/>
-                  <a:cs typeface="Times New Roman" panose="02020603050405020304" pitchFamily="18" charset="0"/>
-                </a:rPr>
-                <a:t>19</a:t>
+                <a:t>41</a:t>
               </a:r>
               <a:endParaRPr lang="fr-FR" dirty="0">
                 <a:solidFill>
@@ -3723,794 +4201,7 @@
     </p:spTree>
     <p:extLst>
       <p:ext uri="{BB962C8B-B14F-4D97-AF65-F5344CB8AC3E}">
-        <p14:creationId xmlns:p14="http://schemas.microsoft.com/office/powerpoint/2010/main" val="4012979273"/>
-      </p:ext>
-    </p:extLst>
-  </p:cSld>
-  <p:clrMapOvr>
-    <a:masterClrMapping/>
-  </p:clrMapOvr>
-  <p:timing>
-    <p:tnLst>
-      <p:par>
-        <p:cTn id="1" dur="indefinite" restart="never" nodeType="tmRoot"/>
-      </p:par>
-    </p:tnLst>
-  </p:timing>
-</p:sld>
-</file>
-
-<file path=ppt/slides/slide2.xml><?xml version="1.0" encoding="utf-8"?>
-<p:sld xmlns:a="http://schemas.openxmlformats.org/drawingml/2006/main" xmlns:r="http://schemas.openxmlformats.org/officeDocument/2006/relationships" xmlns:p="http://schemas.openxmlformats.org/presentationml/2006/main">
-  <p:cSld>
-    <p:spTree>
-      <p:nvGrpSpPr>
-        <p:cNvPr id="1" name=""/>
-        <p:cNvGrpSpPr/>
-        <p:nvPr/>
-      </p:nvGrpSpPr>
-      <p:grpSpPr>
-        <a:xfrm>
-          <a:off x="0" y="0"/>
-          <a:ext cx="0" cy="0"/>
-          <a:chOff x="0" y="0"/>
-          <a:chExt cx="0" cy="0"/>
-        </a:xfrm>
-      </p:grpSpPr>
-      <p:pic>
-        <p:nvPicPr>
-          <p:cNvPr id="2" name="Picture 1"/>
-          <p:cNvPicPr>
-            <a:picLocks noChangeAspect="1"/>
-          </p:cNvPicPr>
-          <p:nvPr/>
-        </p:nvPicPr>
-        <p:blipFill rotWithShape="1">
-          <a:blip r:embed="rId2" cstate="print">
-            <a:extLst>
-              <a:ext uri="{28A0092B-C50C-407E-A947-70E740481C1C}">
-                <a14:useLocalDpi xmlns:a14="http://schemas.microsoft.com/office/drawing/2010/main" val="0"/>
-              </a:ext>
-            </a:extLst>
-          </a:blip>
-          <a:srcRect l="3849" t="22991" r="6669" b="36611"/>
-          <a:stretch/>
-        </p:blipFill>
-        <p:spPr>
-          <a:xfrm>
-            <a:off x="0" y="342078"/>
-            <a:ext cx="12168542" cy="3880298"/>
-          </a:xfrm>
-          <a:prstGeom prst="rect">
-            <a:avLst/>
-          </a:prstGeom>
-        </p:spPr>
-      </p:pic>
-      <p:grpSp>
-        <p:nvGrpSpPr>
-          <p:cNvPr id="7" name="Group 6"/>
-          <p:cNvGrpSpPr/>
-          <p:nvPr/>
-        </p:nvGrpSpPr>
-        <p:grpSpPr>
-          <a:xfrm>
-            <a:off x="5919147" y="1653531"/>
-            <a:ext cx="434176" cy="414440"/>
-            <a:chOff x="1302526" y="4999597"/>
-            <a:chExt cx="434176" cy="414440"/>
-          </a:xfrm>
-        </p:grpSpPr>
-        <p:sp>
-          <p:nvSpPr>
-            <p:cNvPr id="5" name="Oval 4"/>
-            <p:cNvSpPr/>
-            <p:nvPr/>
-          </p:nvSpPr>
-          <p:spPr>
-            <a:xfrm>
-              <a:off x="1315683" y="4999597"/>
-              <a:ext cx="407862" cy="414440"/>
-            </a:xfrm>
-            <a:prstGeom prst="ellipse">
-              <a:avLst/>
-            </a:prstGeom>
-            <a:solidFill>
-              <a:schemeClr val="dk1">
-                <a:alpha val="50000"/>
-              </a:schemeClr>
-            </a:solidFill>
-            <a:ln>
-              <a:noFill/>
-            </a:ln>
-          </p:spPr>
-          <p:style>
-            <a:lnRef idx="0">
-              <a:scrgbClr r="0" g="0" b="0"/>
-            </a:lnRef>
-            <a:fillRef idx="0">
-              <a:scrgbClr r="0" g="0" b="0"/>
-            </a:fillRef>
-            <a:effectRef idx="0">
-              <a:scrgbClr r="0" g="0" b="0"/>
-            </a:effectRef>
-            <a:fontRef idx="minor">
-              <a:schemeClr val="lt1"/>
-            </a:fontRef>
-          </p:style>
-          <p:txBody>
-            <a:bodyPr rtlCol="0" anchor="ctr"/>
-            <a:lstStyle/>
-            <a:p>
-              <a:pPr algn="ctr"/>
-              <a:endParaRPr lang="fr-FR" sz="700" dirty="0"/>
-            </a:p>
-          </p:txBody>
-        </p:sp>
-        <p:sp>
-          <p:nvSpPr>
-            <p:cNvPr id="6" name="TextBox 5"/>
-            <p:cNvSpPr txBox="1"/>
-            <p:nvPr/>
-          </p:nvSpPr>
-          <p:spPr>
-            <a:xfrm>
-              <a:off x="1302526" y="5022151"/>
-              <a:ext cx="434176" cy="369332"/>
-            </a:xfrm>
-            <a:prstGeom prst="rect">
-              <a:avLst/>
-            </a:prstGeom>
-            <a:noFill/>
-          </p:spPr>
-          <p:txBody>
-            <a:bodyPr wrap="square" rtlCol="0">
-              <a:spAutoFit/>
-            </a:bodyPr>
-            <a:lstStyle/>
-            <a:p>
-              <a:r>
-                <a:rPr lang="fr-FR" dirty="0" smtClean="0">
-                  <a:solidFill>
-                    <a:schemeClr val="bg1"/>
-                  </a:solidFill>
-                  <a:latin typeface="Times New Roman" panose="02020603050405020304" pitchFamily="18" charset="0"/>
-                  <a:cs typeface="Times New Roman" panose="02020603050405020304" pitchFamily="18" charset="0"/>
-                </a:rPr>
-                <a:t>13</a:t>
-              </a:r>
-              <a:endParaRPr lang="fr-FR" dirty="0">
-                <a:solidFill>
-                  <a:schemeClr val="bg1"/>
-                </a:solidFill>
-                <a:latin typeface="Times New Roman" panose="02020603050405020304" pitchFamily="18" charset="0"/>
-                <a:cs typeface="Times New Roman" panose="02020603050405020304" pitchFamily="18" charset="0"/>
-              </a:endParaRPr>
-            </a:p>
-          </p:txBody>
-        </p:sp>
-      </p:grpSp>
-      <p:grpSp>
-        <p:nvGrpSpPr>
-          <p:cNvPr id="12" name="Group 11"/>
-          <p:cNvGrpSpPr/>
-          <p:nvPr/>
-        </p:nvGrpSpPr>
-        <p:grpSpPr>
-          <a:xfrm>
-            <a:off x="3581285" y="1446311"/>
-            <a:ext cx="434176" cy="414440"/>
-            <a:chOff x="1302526" y="4999597"/>
-            <a:chExt cx="434176" cy="414440"/>
-          </a:xfrm>
-        </p:grpSpPr>
-        <p:sp>
-          <p:nvSpPr>
-            <p:cNvPr id="13" name="Oval 12"/>
-            <p:cNvSpPr/>
-            <p:nvPr/>
-          </p:nvSpPr>
-          <p:spPr>
-            <a:xfrm>
-              <a:off x="1315683" y="4999597"/>
-              <a:ext cx="407862" cy="414440"/>
-            </a:xfrm>
-            <a:prstGeom prst="ellipse">
-              <a:avLst/>
-            </a:prstGeom>
-            <a:solidFill>
-              <a:schemeClr val="dk1">
-                <a:alpha val="50000"/>
-              </a:schemeClr>
-            </a:solidFill>
-            <a:ln>
-              <a:noFill/>
-            </a:ln>
-          </p:spPr>
-          <p:style>
-            <a:lnRef idx="0">
-              <a:scrgbClr r="0" g="0" b="0"/>
-            </a:lnRef>
-            <a:fillRef idx="0">
-              <a:scrgbClr r="0" g="0" b="0"/>
-            </a:fillRef>
-            <a:effectRef idx="0">
-              <a:scrgbClr r="0" g="0" b="0"/>
-            </a:effectRef>
-            <a:fontRef idx="minor">
-              <a:schemeClr val="lt1"/>
-            </a:fontRef>
-          </p:style>
-          <p:txBody>
-            <a:bodyPr rtlCol="0" anchor="ctr"/>
-            <a:lstStyle/>
-            <a:p>
-              <a:pPr algn="ctr"/>
-              <a:endParaRPr lang="fr-FR" sz="700" dirty="0"/>
-            </a:p>
-          </p:txBody>
-        </p:sp>
-        <p:sp>
-          <p:nvSpPr>
-            <p:cNvPr id="14" name="TextBox 13"/>
-            <p:cNvSpPr txBox="1"/>
-            <p:nvPr/>
-          </p:nvSpPr>
-          <p:spPr>
-            <a:xfrm>
-              <a:off x="1302526" y="5022151"/>
-              <a:ext cx="434176" cy="369332"/>
-            </a:xfrm>
-            <a:prstGeom prst="rect">
-              <a:avLst/>
-            </a:prstGeom>
-            <a:noFill/>
-          </p:spPr>
-          <p:txBody>
-            <a:bodyPr wrap="square" rtlCol="0">
-              <a:spAutoFit/>
-            </a:bodyPr>
-            <a:lstStyle/>
-            <a:p>
-              <a:r>
-                <a:rPr lang="fr-FR" dirty="0" smtClean="0">
-                  <a:solidFill>
-                    <a:schemeClr val="bg1"/>
-                  </a:solidFill>
-                  <a:latin typeface="Times New Roman" panose="02020603050405020304" pitchFamily="18" charset="0"/>
-                  <a:cs typeface="Times New Roman" panose="02020603050405020304" pitchFamily="18" charset="0"/>
-                </a:rPr>
-                <a:t>10</a:t>
-              </a:r>
-              <a:endParaRPr lang="fr-FR" dirty="0">
-                <a:solidFill>
-                  <a:schemeClr val="bg1"/>
-                </a:solidFill>
-                <a:latin typeface="Times New Roman" panose="02020603050405020304" pitchFamily="18" charset="0"/>
-                <a:cs typeface="Times New Roman" panose="02020603050405020304" pitchFamily="18" charset="0"/>
-              </a:endParaRPr>
-            </a:p>
-          </p:txBody>
-        </p:sp>
-      </p:grpSp>
-      <p:grpSp>
-        <p:nvGrpSpPr>
-          <p:cNvPr id="15" name="Group 14"/>
-          <p:cNvGrpSpPr/>
-          <p:nvPr/>
-        </p:nvGrpSpPr>
-        <p:grpSpPr>
-          <a:xfrm>
-            <a:off x="8921430" y="1175619"/>
-            <a:ext cx="434176" cy="414440"/>
-            <a:chOff x="1302526" y="4999597"/>
-            <a:chExt cx="434176" cy="414440"/>
-          </a:xfrm>
-        </p:grpSpPr>
-        <p:sp>
-          <p:nvSpPr>
-            <p:cNvPr id="16" name="Oval 15"/>
-            <p:cNvSpPr/>
-            <p:nvPr/>
-          </p:nvSpPr>
-          <p:spPr>
-            <a:xfrm>
-              <a:off x="1315683" y="4999597"/>
-              <a:ext cx="407862" cy="414440"/>
-            </a:xfrm>
-            <a:prstGeom prst="ellipse">
-              <a:avLst/>
-            </a:prstGeom>
-            <a:solidFill>
-              <a:schemeClr val="dk1">
-                <a:alpha val="50000"/>
-              </a:schemeClr>
-            </a:solidFill>
-            <a:ln>
-              <a:noFill/>
-            </a:ln>
-          </p:spPr>
-          <p:style>
-            <a:lnRef idx="0">
-              <a:scrgbClr r="0" g="0" b="0"/>
-            </a:lnRef>
-            <a:fillRef idx="0">
-              <a:scrgbClr r="0" g="0" b="0"/>
-            </a:fillRef>
-            <a:effectRef idx="0">
-              <a:scrgbClr r="0" g="0" b="0"/>
-            </a:effectRef>
-            <a:fontRef idx="minor">
-              <a:schemeClr val="lt1"/>
-            </a:fontRef>
-          </p:style>
-          <p:txBody>
-            <a:bodyPr rtlCol="0" anchor="ctr"/>
-            <a:lstStyle/>
-            <a:p>
-              <a:pPr algn="ctr"/>
-              <a:endParaRPr lang="fr-FR" sz="700" dirty="0"/>
-            </a:p>
-          </p:txBody>
-        </p:sp>
-        <p:sp>
-          <p:nvSpPr>
-            <p:cNvPr id="17" name="TextBox 16"/>
-            <p:cNvSpPr txBox="1"/>
-            <p:nvPr/>
-          </p:nvSpPr>
-          <p:spPr>
-            <a:xfrm>
-              <a:off x="1302526" y="5022151"/>
-              <a:ext cx="434176" cy="369332"/>
-            </a:xfrm>
-            <a:prstGeom prst="rect">
-              <a:avLst/>
-            </a:prstGeom>
-            <a:noFill/>
-          </p:spPr>
-          <p:txBody>
-            <a:bodyPr wrap="square" rtlCol="0">
-              <a:spAutoFit/>
-            </a:bodyPr>
-            <a:lstStyle/>
-            <a:p>
-              <a:r>
-                <a:rPr lang="fr-FR" dirty="0" smtClean="0">
-                  <a:solidFill>
-                    <a:schemeClr val="bg1"/>
-                  </a:solidFill>
-                  <a:latin typeface="Times New Roman" panose="02020603050405020304" pitchFamily="18" charset="0"/>
-                  <a:cs typeface="Times New Roman" panose="02020603050405020304" pitchFamily="18" charset="0"/>
-                </a:rPr>
-                <a:t>14</a:t>
-              </a:r>
-              <a:endParaRPr lang="fr-FR" dirty="0">
-                <a:solidFill>
-                  <a:schemeClr val="bg1"/>
-                </a:solidFill>
-                <a:latin typeface="Times New Roman" panose="02020603050405020304" pitchFamily="18" charset="0"/>
-                <a:cs typeface="Times New Roman" panose="02020603050405020304" pitchFamily="18" charset="0"/>
-              </a:endParaRPr>
-            </a:p>
-          </p:txBody>
-        </p:sp>
-      </p:grpSp>
-      <p:grpSp>
-        <p:nvGrpSpPr>
-          <p:cNvPr id="18" name="Group 17"/>
-          <p:cNvGrpSpPr/>
-          <p:nvPr/>
-        </p:nvGrpSpPr>
-        <p:grpSpPr>
-          <a:xfrm>
-            <a:off x="6586092" y="2067971"/>
-            <a:ext cx="434176" cy="414440"/>
-            <a:chOff x="1302526" y="4999597"/>
-            <a:chExt cx="434176" cy="414440"/>
-          </a:xfrm>
-        </p:grpSpPr>
-        <p:sp>
-          <p:nvSpPr>
-            <p:cNvPr id="19" name="Oval 18"/>
-            <p:cNvSpPr/>
-            <p:nvPr/>
-          </p:nvSpPr>
-          <p:spPr>
-            <a:xfrm>
-              <a:off x="1315683" y="4999597"/>
-              <a:ext cx="407862" cy="414440"/>
-            </a:xfrm>
-            <a:prstGeom prst="ellipse">
-              <a:avLst/>
-            </a:prstGeom>
-            <a:solidFill>
-              <a:schemeClr val="dk1">
-                <a:alpha val="50000"/>
-              </a:schemeClr>
-            </a:solidFill>
-            <a:ln>
-              <a:noFill/>
-            </a:ln>
-          </p:spPr>
-          <p:style>
-            <a:lnRef idx="0">
-              <a:scrgbClr r="0" g="0" b="0"/>
-            </a:lnRef>
-            <a:fillRef idx="0">
-              <a:scrgbClr r="0" g="0" b="0"/>
-            </a:fillRef>
-            <a:effectRef idx="0">
-              <a:scrgbClr r="0" g="0" b="0"/>
-            </a:effectRef>
-            <a:fontRef idx="minor">
-              <a:schemeClr val="lt1"/>
-            </a:fontRef>
-          </p:style>
-          <p:txBody>
-            <a:bodyPr rtlCol="0" anchor="ctr"/>
-            <a:lstStyle/>
-            <a:p>
-              <a:pPr algn="ctr"/>
-              <a:endParaRPr lang="fr-FR" sz="700" dirty="0"/>
-            </a:p>
-          </p:txBody>
-        </p:sp>
-        <p:sp>
-          <p:nvSpPr>
-            <p:cNvPr id="20" name="TextBox 19"/>
-            <p:cNvSpPr txBox="1"/>
-            <p:nvPr/>
-          </p:nvSpPr>
-          <p:spPr>
-            <a:xfrm>
-              <a:off x="1302526" y="5022151"/>
-              <a:ext cx="434176" cy="369332"/>
-            </a:xfrm>
-            <a:prstGeom prst="rect">
-              <a:avLst/>
-            </a:prstGeom>
-            <a:noFill/>
-          </p:spPr>
-          <p:txBody>
-            <a:bodyPr wrap="square" rtlCol="0">
-              <a:spAutoFit/>
-            </a:bodyPr>
-            <a:lstStyle/>
-            <a:p>
-              <a:r>
-                <a:rPr lang="fr-FR" dirty="0" smtClean="0">
-                  <a:solidFill>
-                    <a:schemeClr val="bg1"/>
-                  </a:solidFill>
-                  <a:latin typeface="Times New Roman" panose="02020603050405020304" pitchFamily="18" charset="0"/>
-                  <a:cs typeface="Times New Roman" panose="02020603050405020304" pitchFamily="18" charset="0"/>
-                </a:rPr>
-                <a:t>16</a:t>
-              </a:r>
-              <a:endParaRPr lang="fr-FR" dirty="0">
-                <a:solidFill>
-                  <a:schemeClr val="bg1"/>
-                </a:solidFill>
-                <a:latin typeface="Times New Roman" panose="02020603050405020304" pitchFamily="18" charset="0"/>
-                <a:cs typeface="Times New Roman" panose="02020603050405020304" pitchFamily="18" charset="0"/>
-              </a:endParaRPr>
-            </a:p>
-          </p:txBody>
-        </p:sp>
-      </p:grpSp>
-      <p:grpSp>
-        <p:nvGrpSpPr>
-          <p:cNvPr id="21" name="Group 20"/>
-          <p:cNvGrpSpPr/>
-          <p:nvPr/>
-        </p:nvGrpSpPr>
-        <p:grpSpPr>
-          <a:xfrm>
-            <a:off x="8704342" y="3067813"/>
-            <a:ext cx="434176" cy="414440"/>
-            <a:chOff x="1302526" y="4999597"/>
-            <a:chExt cx="434176" cy="414440"/>
-          </a:xfrm>
-        </p:grpSpPr>
-        <p:sp>
-          <p:nvSpPr>
-            <p:cNvPr id="22" name="Oval 21"/>
-            <p:cNvSpPr/>
-            <p:nvPr/>
-          </p:nvSpPr>
-          <p:spPr>
-            <a:xfrm>
-              <a:off x="1315683" y="4999597"/>
-              <a:ext cx="407862" cy="414440"/>
-            </a:xfrm>
-            <a:prstGeom prst="ellipse">
-              <a:avLst/>
-            </a:prstGeom>
-            <a:solidFill>
-              <a:schemeClr val="dk1">
-                <a:alpha val="50000"/>
-              </a:schemeClr>
-            </a:solidFill>
-            <a:ln>
-              <a:noFill/>
-            </a:ln>
-          </p:spPr>
-          <p:style>
-            <a:lnRef idx="0">
-              <a:scrgbClr r="0" g="0" b="0"/>
-            </a:lnRef>
-            <a:fillRef idx="0">
-              <a:scrgbClr r="0" g="0" b="0"/>
-            </a:fillRef>
-            <a:effectRef idx="0">
-              <a:scrgbClr r="0" g="0" b="0"/>
-            </a:effectRef>
-            <a:fontRef idx="minor">
-              <a:schemeClr val="lt1"/>
-            </a:fontRef>
-          </p:style>
-          <p:txBody>
-            <a:bodyPr rtlCol="0" anchor="ctr"/>
-            <a:lstStyle/>
-            <a:p>
-              <a:pPr algn="ctr"/>
-              <a:endParaRPr lang="fr-FR" sz="700" dirty="0"/>
-            </a:p>
-          </p:txBody>
-        </p:sp>
-        <p:sp>
-          <p:nvSpPr>
-            <p:cNvPr id="23" name="TextBox 22"/>
-            <p:cNvSpPr txBox="1"/>
-            <p:nvPr/>
-          </p:nvSpPr>
-          <p:spPr>
-            <a:xfrm>
-              <a:off x="1302526" y="5022151"/>
-              <a:ext cx="434176" cy="369332"/>
-            </a:xfrm>
-            <a:prstGeom prst="rect">
-              <a:avLst/>
-            </a:prstGeom>
-            <a:noFill/>
-          </p:spPr>
-          <p:txBody>
-            <a:bodyPr wrap="square" rtlCol="0">
-              <a:spAutoFit/>
-            </a:bodyPr>
-            <a:lstStyle/>
-            <a:p>
-              <a:r>
-                <a:rPr lang="fr-FR" dirty="0" smtClean="0">
-                  <a:solidFill>
-                    <a:schemeClr val="bg1"/>
-                  </a:solidFill>
-                  <a:latin typeface="Times New Roman" panose="02020603050405020304" pitchFamily="18" charset="0"/>
-                  <a:cs typeface="Times New Roman" panose="02020603050405020304" pitchFamily="18" charset="0"/>
-                </a:rPr>
-                <a:t>17</a:t>
-              </a:r>
-              <a:endParaRPr lang="fr-FR" dirty="0">
-                <a:solidFill>
-                  <a:schemeClr val="bg1"/>
-                </a:solidFill>
-                <a:latin typeface="Times New Roman" panose="02020603050405020304" pitchFamily="18" charset="0"/>
-                <a:cs typeface="Times New Roman" panose="02020603050405020304" pitchFamily="18" charset="0"/>
-              </a:endParaRPr>
-            </a:p>
-          </p:txBody>
-        </p:sp>
-      </p:grpSp>
-      <p:grpSp>
-        <p:nvGrpSpPr>
-          <p:cNvPr id="24" name="Group 23"/>
-          <p:cNvGrpSpPr/>
-          <p:nvPr/>
-        </p:nvGrpSpPr>
-        <p:grpSpPr>
-          <a:xfrm>
-            <a:off x="2260782" y="3252479"/>
-            <a:ext cx="434176" cy="414440"/>
-            <a:chOff x="1302526" y="4999597"/>
-            <a:chExt cx="434176" cy="414440"/>
-          </a:xfrm>
-        </p:grpSpPr>
-        <p:sp>
-          <p:nvSpPr>
-            <p:cNvPr id="25" name="Oval 24"/>
-            <p:cNvSpPr/>
-            <p:nvPr/>
-          </p:nvSpPr>
-          <p:spPr>
-            <a:xfrm>
-              <a:off x="1315683" y="4999597"/>
-              <a:ext cx="407862" cy="414440"/>
-            </a:xfrm>
-            <a:prstGeom prst="ellipse">
-              <a:avLst/>
-            </a:prstGeom>
-            <a:solidFill>
-              <a:schemeClr val="dk1">
-                <a:alpha val="50000"/>
-              </a:schemeClr>
-            </a:solidFill>
-            <a:ln>
-              <a:noFill/>
-            </a:ln>
-          </p:spPr>
-          <p:style>
-            <a:lnRef idx="0">
-              <a:scrgbClr r="0" g="0" b="0"/>
-            </a:lnRef>
-            <a:fillRef idx="0">
-              <a:scrgbClr r="0" g="0" b="0"/>
-            </a:fillRef>
-            <a:effectRef idx="0">
-              <a:scrgbClr r="0" g="0" b="0"/>
-            </a:effectRef>
-            <a:fontRef idx="minor">
-              <a:schemeClr val="lt1"/>
-            </a:fontRef>
-          </p:style>
-          <p:txBody>
-            <a:bodyPr rtlCol="0" anchor="ctr"/>
-            <a:lstStyle/>
-            <a:p>
-              <a:pPr algn="ctr"/>
-              <a:endParaRPr lang="fr-FR" sz="700" dirty="0"/>
-            </a:p>
-          </p:txBody>
-        </p:sp>
-        <p:sp>
-          <p:nvSpPr>
-            <p:cNvPr id="26" name="TextBox 25"/>
-            <p:cNvSpPr txBox="1"/>
-            <p:nvPr/>
-          </p:nvSpPr>
-          <p:spPr>
-            <a:xfrm>
-              <a:off x="1302526" y="5022151"/>
-              <a:ext cx="434176" cy="369332"/>
-            </a:xfrm>
-            <a:prstGeom prst="rect">
-              <a:avLst/>
-            </a:prstGeom>
-            <a:noFill/>
-          </p:spPr>
-          <p:txBody>
-            <a:bodyPr wrap="square" rtlCol="0">
-              <a:spAutoFit/>
-            </a:bodyPr>
-            <a:lstStyle/>
-            <a:p>
-              <a:r>
-                <a:rPr lang="fr-FR" dirty="0" smtClean="0">
-                  <a:solidFill>
-                    <a:schemeClr val="bg1"/>
-                  </a:solidFill>
-                  <a:latin typeface="Times New Roman" panose="02020603050405020304" pitchFamily="18" charset="0"/>
-                  <a:cs typeface="Times New Roman" panose="02020603050405020304" pitchFamily="18" charset="0"/>
-                </a:rPr>
-                <a:t>18</a:t>
-              </a:r>
-              <a:endParaRPr lang="fr-FR" dirty="0">
-                <a:solidFill>
-                  <a:schemeClr val="bg1"/>
-                </a:solidFill>
-                <a:latin typeface="Times New Roman" panose="02020603050405020304" pitchFamily="18" charset="0"/>
-                <a:cs typeface="Times New Roman" panose="02020603050405020304" pitchFamily="18" charset="0"/>
-              </a:endParaRPr>
-            </a:p>
-          </p:txBody>
-        </p:sp>
-      </p:grpSp>
-      <p:grpSp>
-        <p:nvGrpSpPr>
-          <p:cNvPr id="27" name="Group 26"/>
-          <p:cNvGrpSpPr/>
-          <p:nvPr/>
-        </p:nvGrpSpPr>
-        <p:grpSpPr>
-          <a:xfrm>
-            <a:off x="2574353" y="2838039"/>
-            <a:ext cx="434176" cy="414440"/>
-            <a:chOff x="1302526" y="4999597"/>
-            <a:chExt cx="434176" cy="414440"/>
-          </a:xfrm>
-        </p:grpSpPr>
-        <p:sp>
-          <p:nvSpPr>
-            <p:cNvPr id="28" name="Oval 27"/>
-            <p:cNvSpPr/>
-            <p:nvPr/>
-          </p:nvSpPr>
-          <p:spPr>
-            <a:xfrm>
-              <a:off x="1315683" y="4999597"/>
-              <a:ext cx="407862" cy="414440"/>
-            </a:xfrm>
-            <a:prstGeom prst="ellipse">
-              <a:avLst/>
-            </a:prstGeom>
-            <a:solidFill>
-              <a:schemeClr val="dk1">
-                <a:alpha val="50000"/>
-              </a:schemeClr>
-            </a:solidFill>
-            <a:ln>
-              <a:noFill/>
-            </a:ln>
-          </p:spPr>
-          <p:style>
-            <a:lnRef idx="0">
-              <a:scrgbClr r="0" g="0" b="0"/>
-            </a:lnRef>
-            <a:fillRef idx="0">
-              <a:scrgbClr r="0" g="0" b="0"/>
-            </a:fillRef>
-            <a:effectRef idx="0">
-              <a:scrgbClr r="0" g="0" b="0"/>
-            </a:effectRef>
-            <a:fontRef idx="minor">
-              <a:schemeClr val="lt1"/>
-            </a:fontRef>
-          </p:style>
-          <p:txBody>
-            <a:bodyPr rtlCol="0" anchor="ctr"/>
-            <a:lstStyle/>
-            <a:p>
-              <a:pPr algn="ctr"/>
-              <a:endParaRPr lang="fr-FR" sz="700" dirty="0"/>
-            </a:p>
-          </p:txBody>
-        </p:sp>
-        <p:sp>
-          <p:nvSpPr>
-            <p:cNvPr id="29" name="TextBox 28"/>
-            <p:cNvSpPr txBox="1"/>
-            <p:nvPr/>
-          </p:nvSpPr>
-          <p:spPr>
-            <a:xfrm>
-              <a:off x="1302526" y="5022151"/>
-              <a:ext cx="434176" cy="369332"/>
-            </a:xfrm>
-            <a:prstGeom prst="rect">
-              <a:avLst/>
-            </a:prstGeom>
-            <a:noFill/>
-          </p:spPr>
-          <p:txBody>
-            <a:bodyPr wrap="square" rtlCol="0">
-              <a:spAutoFit/>
-            </a:bodyPr>
-            <a:lstStyle/>
-            <a:p>
-              <a:r>
-                <a:rPr lang="fr-FR" dirty="0" smtClean="0">
-                  <a:solidFill>
-                    <a:schemeClr val="bg1"/>
-                  </a:solidFill>
-                  <a:latin typeface="Times New Roman" panose="02020603050405020304" pitchFamily="18" charset="0"/>
-                  <a:cs typeface="Times New Roman" panose="02020603050405020304" pitchFamily="18" charset="0"/>
-                </a:rPr>
-                <a:t>19</a:t>
-              </a:r>
-              <a:endParaRPr lang="fr-FR" dirty="0">
-                <a:solidFill>
-                  <a:schemeClr val="bg1"/>
-                </a:solidFill>
-                <a:latin typeface="Times New Roman" panose="02020603050405020304" pitchFamily="18" charset="0"/>
-                <a:cs typeface="Times New Roman" panose="02020603050405020304" pitchFamily="18" charset="0"/>
-              </a:endParaRPr>
-            </a:p>
-          </p:txBody>
-        </p:sp>
-      </p:grpSp>
-    </p:spTree>
-    <p:extLst>
-      <p:ext uri="{BB962C8B-B14F-4D97-AF65-F5344CB8AC3E}">
-        <p14:creationId xmlns:p14="http://schemas.microsoft.com/office/powerpoint/2010/main" val="908374057"/>
+        <p14:creationId xmlns:p14="http://schemas.microsoft.com/office/powerpoint/2010/main" val="3678415053"/>
       </p:ext>
     </p:extLst>
   </p:cSld>

--- a/images/Num_Ouvrages.pptx
+++ b/images/Num_Ouvrages.pptx
@@ -2972,7 +2972,7 @@
       </p:grpSpPr>
       <p:pic>
         <p:nvPicPr>
-          <p:cNvPr id="3" name="Picture 2"/>
+          <p:cNvPr id="2" name="Picture 1"/>
           <p:cNvPicPr>
             <a:picLocks noChangeAspect="1"/>
           </p:cNvPicPr>
@@ -2986,13 +2986,13 @@
               </a:ext>
             </a:extLst>
           </a:blip>
-          <a:srcRect l="-719" t="25474" r="1" b="23997"/>
+          <a:srcRect t="23853" b="17187"/>
           <a:stretch/>
         </p:blipFill>
         <p:spPr>
           <a:xfrm>
-            <a:off x="-85519" y="0"/>
-            <a:ext cx="12254061" cy="4348333"/>
+            <a:off x="0" y="0"/>
+            <a:ext cx="12168542" cy="4348333"/>
           </a:xfrm>
           <a:prstGeom prst="rect">
             <a:avLst/>
@@ -3007,7 +3007,7 @@
         </p:nvGrpSpPr>
         <p:grpSpPr>
           <a:xfrm>
-            <a:off x="6320430" y="608269"/>
+            <a:off x="6811250" y="448704"/>
             <a:ext cx="434176" cy="414440"/>
             <a:chOff x="1302526" y="4999597"/>
             <a:chExt cx="434176" cy="414440"/>
@@ -3110,7 +3110,7 @@
         </p:nvGrpSpPr>
         <p:grpSpPr>
           <a:xfrm>
-            <a:off x="8357216" y="608269"/>
+            <a:off x="9204560" y="169357"/>
             <a:ext cx="434176" cy="414440"/>
             <a:chOff x="1302526" y="4999597"/>
             <a:chExt cx="434176" cy="414440"/>
@@ -3316,7 +3316,7 @@
         </p:nvGrpSpPr>
         <p:grpSpPr>
           <a:xfrm>
-            <a:off x="6382161" y="2798175"/>
+            <a:off x="7028338" y="2609199"/>
             <a:ext cx="434176" cy="414440"/>
             <a:chOff x="1309104" y="4999597"/>
             <a:chExt cx="434176" cy="414440"/>
@@ -3419,7 +3419,7 @@
         </p:nvGrpSpPr>
         <p:grpSpPr>
           <a:xfrm>
-            <a:off x="8079392" y="3212615"/>
+            <a:off x="9068131" y="2932199"/>
             <a:ext cx="434176" cy="414440"/>
             <a:chOff x="1309104" y="4999597"/>
             <a:chExt cx="434176" cy="414440"/>
